--- a/slides/AI编码Agent知识库建设洞察报告.pptx
+++ b/slides/AI编码Agent知识库建设洞察报告.pptx
@@ -4686,7 +4686,47 @@
                 <a:latin typeface="微软雅黑"/>
                 <a:ea typeface="微软雅黑"/>
               </a:rPr>
-              <a:t>——宪法层（每会话必加载）+ 知识层（按需导航）+ 结构层（clangd MCP），向量检索作为痛点驱动的可选补充；对现有 CLAUDE.md / skills / specs / docs 存量资产是</a:t>
+              <a:t>——知识层按</a:t>
+            </a:r>
+            <a:r>
+              <a:rPr sz="1400" b="1">
+                <a:solidFill>
+                  <a:srgbClr val="0000FF"/>
+                </a:solidFill>
+                <a:latin typeface="微软雅黑"/>
+                <a:ea typeface="微软雅黑"/>
+              </a:rPr>
+              <a:t>五类基础知识</a:t>
+            </a:r>
+            <a:r>
+              <a:rPr sz="1400" b="0">
+                <a:solidFill>
+                  <a:srgbClr val="000000"/>
+                </a:solidFill>
+                <a:latin typeface="微软雅黑"/>
+                <a:ea typeface="微软雅黑"/>
+              </a:rPr>
+              <a:t>组织（领域 / 架构 / 决策 / 规范与约束 / 代码）：前四类沉淀为 Markdown wiki，</a:t>
+            </a:r>
+            <a:r>
+              <a:rPr sz="1400" b="1">
+                <a:solidFill>
+                  <a:srgbClr val="000000"/>
+                </a:solidFill>
+                <a:latin typeface="微软雅黑"/>
+                <a:ea typeface="微软雅黑"/>
+              </a:rPr>
+              <a:t>代码知识由结构层 clangd/LSP 实时派生</a:t>
+            </a:r>
+            <a:r>
+              <a:rPr sz="1400" b="0">
+                <a:solidFill>
+                  <a:srgbClr val="000000"/>
+                </a:solidFill>
+                <a:latin typeface="微软雅黑"/>
+                <a:ea typeface="微软雅黑"/>
+              </a:rPr>
+              <a:t>；对存量资产是</a:t>
             </a:r>
             <a:r>
               <a:rPr sz="1400" b="1">
@@ -5593,7 +5633,7 @@
                 <a:latin typeface="微软雅黑"/>
                 <a:ea typeface="微软雅黑"/>
               </a:rPr>
-              <a:t>知识层｜docs/wiki/ 按需读取（Agent 顺指针导航）</a:t>
+              <a:t>知识层｜docs/wiki/ 五类基础知识（按需读取）</a:t>
             </a:r>
           </a:p>
         </p:txBody>
@@ -5607,7 +5647,7 @@
         <p:spPr>
           <a:xfrm>
             <a:off x="704850" y="3200400"/>
-            <a:ext cx="1143000" cy="304800"/>
+            <a:ext cx="1143000" cy="342900"/>
           </a:xfrm>
           <a:prstGeom prst="roundRect">
             <a:avLst>
@@ -5652,7 +5692,7 @@
         </p:nvSpPr>
         <p:spPr>
           <a:xfrm>
-            <a:off x="704850" y="3276600"/>
+            <a:off x="704850" y="3238500"/>
             <a:ext cx="1143000" cy="152400"/>
           </a:xfrm>
           <a:prstGeom prst="rect">
@@ -5675,7 +5715,7 @@
               </a:spcAft>
             </a:pPr>
             <a:r>
-              <a:rPr sz="950" b="1">
+              <a:rPr sz="900" b="1">
                 <a:solidFill>
                   <a:srgbClr val="FFFFFF"/>
                 </a:solidFill>
@@ -5689,14 +5729,57 @@
       </p:sp>
       <p:sp>
         <p:nvSpPr>
-          <p:cNvPr id="29" name="Rounded Rectangle 28"/>
+          <p:cNvPr id="29" name="TextBox 28"/>
+          <p:cNvSpPr txBox="1"/>
+          <p:nvPr/>
+        </p:nvSpPr>
+        <p:spPr>
+          <a:xfrm>
+            <a:off x="704850" y="3390900"/>
+            <a:ext cx="1143000" cy="133350"/>
+          </a:xfrm>
+          <a:prstGeom prst="rect">
+            <a:avLst/>
+          </a:prstGeom>
+          <a:noFill/>
+        </p:spPr>
+        <p:txBody>
+          <a:bodyPr wrap="square" anchor="t" lIns="0" rIns="0" tIns="0" bIns="0">
+            <a:spAutoFit/>
+          </a:bodyPr>
+          <a:lstStyle/>
+          <a:p>
+            <a:pPr algn="ctr">
+              <a:lnSpc>
+                <a:spcPct val="125000"/>
+              </a:lnSpc>
+              <a:spcAft>
+                <a:spcPts val="200"/>
+              </a:spcAft>
+            </a:pPr>
+            <a:r>
+              <a:rPr sz="700" b="0">
+                <a:solidFill>
+                  <a:srgbClr val="FFFFFF"/>
+                </a:solidFill>
+                <a:latin typeface="微软雅黑"/>
+                <a:ea typeface="微软雅黑"/>
+              </a:rPr>
+              <a:t>Agent 导航入口</a:t>
+            </a:r>
+          </a:p>
+        </p:txBody>
+      </p:sp>
+      <p:sp>
+        <p:nvSpPr>
+          <p:cNvPr id="30" name="Rounded Rectangle 29"/>
           <p:cNvSpPr/>
           <p:nvPr/>
         </p:nvSpPr>
         <p:spPr>
           <a:xfrm>
-            <a:off x="1981200" y="3200400"/>
-            <a:ext cx="1200150" cy="304800"/>
+            <a:off x="1924050" y="3200400"/>
+            <a:ext cx="1200150" cy="342900"/>
           </a:xfrm>
           <a:prstGeom prst="roundRect">
             <a:avLst>
@@ -5737,13 +5820,13 @@
       </p:sp>
       <p:sp>
         <p:nvSpPr>
-          <p:cNvPr id="30" name="TextBox 29"/>
+          <p:cNvPr id="31" name="TextBox 30"/>
           <p:cNvSpPr txBox="1"/>
           <p:nvPr/>
         </p:nvSpPr>
         <p:spPr>
           <a:xfrm>
-            <a:off x="1981200" y="3219450"/>
+            <a:off x="1924050" y="3228975"/>
             <a:ext cx="1200150" cy="133350"/>
           </a:xfrm>
           <a:prstGeom prst="rect">
@@ -5766,27 +5849,27 @@
               </a:spcAft>
             </a:pPr>
             <a:r>
-              <a:rPr sz="800" b="0">
+              <a:rPr sz="750" b="1">
                 <a:solidFill>
                   <a:srgbClr val="000000"/>
                 </a:solidFill>
                 <a:latin typeface="微软雅黑"/>
                 <a:ea typeface="微软雅黑"/>
               </a:rPr>
-              <a:t>architecture/ 模块地图</a:t>
-            </a:r>
-          </a:p>
-        </p:txBody>
-      </p:sp>
-      <p:sp>
-        <p:nvSpPr>
-          <p:cNvPr id="31" name="TextBox 30"/>
+              <a:t>domain/ 领域知识</a:t>
+            </a:r>
+          </a:p>
+        </p:txBody>
+      </p:sp>
+      <p:sp>
+        <p:nvSpPr>
+          <p:cNvPr id="32" name="TextBox 31"/>
           <p:cNvSpPr txBox="1"/>
           <p:nvPr/>
         </p:nvSpPr>
         <p:spPr>
           <a:xfrm>
-            <a:off x="1981200" y="3352800"/>
+            <a:off x="1924050" y="3381375"/>
             <a:ext cx="1200150" cy="133350"/>
           </a:xfrm>
           <a:prstGeom prst="rect">
@@ -5809,28 +5892,28 @@
               </a:spcAft>
             </a:pPr>
             <a:r>
-              <a:rPr sz="700" b="0">
+              <a:rPr sz="650" b="0">
                 <a:solidFill>
                   <a:srgbClr val="555555"/>
                 </a:solidFill>
                 <a:latin typeface="微软雅黑"/>
                 <a:ea typeface="微软雅黑"/>
               </a:rPr>
-              <a:t>依赖方向·数据流图</a:t>
-            </a:r>
-          </a:p>
-        </p:txBody>
-      </p:sp>
-      <p:sp>
-        <p:nvSpPr>
-          <p:cNvPr id="32" name="Rounded Rectangle 31"/>
+              <a:t>业务知识·领域术语·产品手册</a:t>
+            </a:r>
+          </a:p>
+        </p:txBody>
+      </p:sp>
+      <p:sp>
+        <p:nvSpPr>
+          <p:cNvPr id="33" name="Rounded Rectangle 32"/>
           <p:cNvSpPr/>
           <p:nvPr/>
         </p:nvSpPr>
         <p:spPr>
           <a:xfrm>
-            <a:off x="3314700" y="3200400"/>
-            <a:ext cx="1200150" cy="304800"/>
+            <a:off x="3257550" y="3200400"/>
+            <a:ext cx="1200150" cy="342900"/>
           </a:xfrm>
           <a:prstGeom prst="roundRect">
             <a:avLst>
@@ -5871,13 +5954,13 @@
       </p:sp>
       <p:sp>
         <p:nvSpPr>
-          <p:cNvPr id="33" name="TextBox 32"/>
+          <p:cNvPr id="34" name="TextBox 33"/>
           <p:cNvSpPr txBox="1"/>
           <p:nvPr/>
         </p:nvSpPr>
         <p:spPr>
           <a:xfrm>
-            <a:off x="3314700" y="3219450"/>
+            <a:off x="3257550" y="3228975"/>
             <a:ext cx="1200150" cy="133350"/>
           </a:xfrm>
           <a:prstGeom prst="rect">
@@ -5900,27 +5983,27 @@
               </a:spcAft>
             </a:pPr>
             <a:r>
-              <a:rPr sz="800" b="0">
+              <a:rPr sz="750" b="1">
                 <a:solidFill>
                   <a:srgbClr val="000000"/>
                 </a:solidFill>
                 <a:latin typeface="微软雅黑"/>
                 <a:ea typeface="微软雅黑"/>
               </a:rPr>
-              <a:t>domain/ 业务概念</a:t>
-            </a:r>
-          </a:p>
-        </p:txBody>
-      </p:sp>
-      <p:sp>
-        <p:nvSpPr>
-          <p:cNvPr id="34" name="TextBox 33"/>
+              <a:t>architecture/ 架构知识</a:t>
+            </a:r>
+          </a:p>
+        </p:txBody>
+      </p:sp>
+      <p:sp>
+        <p:nvSpPr>
+          <p:cNvPr id="35" name="TextBox 34"/>
           <p:cNvSpPr txBox="1"/>
           <p:nvPr/>
         </p:nvSpPr>
         <p:spPr>
           <a:xfrm>
-            <a:off x="3314700" y="3352800"/>
+            <a:off x="3257550" y="3381375"/>
             <a:ext cx="1200150" cy="133350"/>
           </a:xfrm>
           <a:prstGeom prst="rect">
@@ -5943,28 +6026,28 @@
               </a:spcAft>
             </a:pPr>
             <a:r>
-              <a:rPr sz="700" b="0">
+              <a:rPr sz="650" b="0">
                 <a:solidFill>
                   <a:srgbClr val="555555"/>
                 </a:solidFill>
                 <a:latin typeface="微软雅黑"/>
                 <a:ea typeface="微软雅黑"/>
               </a:rPr>
-              <a:t>术语表</a:t>
-            </a:r>
-          </a:p>
-        </p:txBody>
-      </p:sp>
-      <p:sp>
-        <p:nvSpPr>
-          <p:cNvPr id="35" name="Rounded Rectangle 34"/>
+              <a:t>架构设计·特性设计·实现设计</a:t>
+            </a:r>
+          </a:p>
+        </p:txBody>
+      </p:sp>
+      <p:sp>
+        <p:nvSpPr>
+          <p:cNvPr id="36" name="Rounded Rectangle 35"/>
           <p:cNvSpPr/>
           <p:nvPr/>
         </p:nvSpPr>
         <p:spPr>
           <a:xfrm>
-            <a:off x="704850" y="3581400"/>
-            <a:ext cx="1200150" cy="304800"/>
+            <a:off x="704850" y="3600450"/>
+            <a:ext cx="1200150" cy="342900"/>
           </a:xfrm>
           <a:prstGeom prst="roundRect">
             <a:avLst>
@@ -6005,13 +6088,13 @@
       </p:sp>
       <p:sp>
         <p:nvSpPr>
-          <p:cNvPr id="36" name="TextBox 35"/>
+          <p:cNvPr id="37" name="TextBox 36"/>
           <p:cNvSpPr txBox="1"/>
           <p:nvPr/>
         </p:nvSpPr>
         <p:spPr>
           <a:xfrm>
-            <a:off x="704850" y="3600450"/>
+            <a:off x="704850" y="3629025"/>
             <a:ext cx="1200150" cy="133350"/>
           </a:xfrm>
           <a:prstGeom prst="rect">
@@ -6034,27 +6117,27 @@
               </a:spcAft>
             </a:pPr>
             <a:r>
-              <a:rPr sz="800" b="0">
+              <a:rPr sz="750" b="1">
                 <a:solidFill>
                   <a:srgbClr val="000000"/>
                 </a:solidFill>
                 <a:latin typeface="微软雅黑"/>
                 <a:ea typeface="微软雅黑"/>
               </a:rPr>
-              <a:t>decisions/ ADR</a:t>
-            </a:r>
-          </a:p>
-        </p:txBody>
-      </p:sp>
-      <p:sp>
-        <p:nvSpPr>
-          <p:cNvPr id="37" name="TextBox 36"/>
+              <a:t>decisions/ 决策知识</a:t>
+            </a:r>
+          </a:p>
+        </p:txBody>
+      </p:sp>
+      <p:sp>
+        <p:nvSpPr>
+          <p:cNvPr id="38" name="TextBox 37"/>
           <p:cNvSpPr txBox="1"/>
           <p:nvPr/>
         </p:nvSpPr>
         <p:spPr>
           <a:xfrm>
-            <a:off x="704850" y="3733800"/>
+            <a:off x="704850" y="3781425"/>
             <a:ext cx="1200150" cy="133350"/>
           </a:xfrm>
           <a:prstGeom prst="rect">
@@ -6077,28 +6160,28 @@
               </a:spcAft>
             </a:pPr>
             <a:r>
-              <a:rPr sz="700" b="0">
+              <a:rPr sz="650" b="0">
                 <a:solidFill>
                   <a:srgbClr val="555555"/>
                 </a:solidFill>
                 <a:latin typeface="微软雅黑"/>
                 <a:ea typeface="微软雅黑"/>
               </a:rPr>
-              <a:t>"为什么"而非"是什么"</a:t>
-            </a:r>
-          </a:p>
-        </p:txBody>
-      </p:sp>
-      <p:sp>
-        <p:nvSpPr>
-          <p:cNvPr id="38" name="Rounded Rectangle 37"/>
+              <a:t>CCB·NodePC·DRB 评审决策</a:t>
+            </a:r>
+          </a:p>
+        </p:txBody>
+      </p:sp>
+      <p:sp>
+        <p:nvSpPr>
+          <p:cNvPr id="39" name="Rounded Rectangle 38"/>
           <p:cNvSpPr/>
           <p:nvPr/>
         </p:nvSpPr>
         <p:spPr>
           <a:xfrm>
-            <a:off x="1981200" y="3581400"/>
-            <a:ext cx="1200150" cy="304800"/>
+            <a:off x="1924050" y="3600450"/>
+            <a:ext cx="1200150" cy="342900"/>
           </a:xfrm>
           <a:prstGeom prst="roundRect">
             <a:avLst>
@@ -6139,13 +6222,13 @@
       </p:sp>
       <p:sp>
         <p:nvSpPr>
-          <p:cNvPr id="39" name="TextBox 38"/>
+          <p:cNvPr id="40" name="TextBox 39"/>
           <p:cNvSpPr txBox="1"/>
           <p:nvPr/>
         </p:nvSpPr>
         <p:spPr>
           <a:xfrm>
-            <a:off x="1981200" y="3600450"/>
+            <a:off x="1924050" y="3629025"/>
             <a:ext cx="1200150" cy="133350"/>
           </a:xfrm>
           <a:prstGeom prst="rect">
@@ -6168,27 +6251,27 @@
               </a:spcAft>
             </a:pPr>
             <a:r>
-              <a:rPr sz="800" b="0">
+              <a:rPr sz="750" b="1">
                 <a:solidFill>
                   <a:srgbClr val="000000"/>
                 </a:solidFill>
                 <a:latin typeface="微软雅黑"/>
                 <a:ea typeface="微软雅黑"/>
               </a:rPr>
-              <a:t>conventions/ 编码规范</a:t>
-            </a:r>
-          </a:p>
-        </p:txBody>
-      </p:sp>
-      <p:sp>
-        <p:nvSpPr>
-          <p:cNvPr id="40" name="TextBox 39"/>
+              <a:t>conventions/ 规范与约束</a:t>
+            </a:r>
+          </a:p>
+        </p:txBody>
+      </p:sp>
+      <p:sp>
+        <p:nvSpPr>
+          <p:cNvPr id="41" name="TextBox 40"/>
           <p:cNvSpPr txBox="1"/>
           <p:nvPr/>
         </p:nvSpPr>
         <p:spPr>
           <a:xfrm>
-            <a:off x="1981200" y="3733800"/>
+            <a:off x="1924050" y="3781425"/>
             <a:ext cx="1200150" cy="133350"/>
           </a:xfrm>
           <a:prstGeom prst="rect">
@@ -6211,28 +6294,28 @@
               </a:spcAft>
             </a:pPr>
             <a:r>
-              <a:rPr sz="700" b="0">
+              <a:rPr sz="650" b="0">
                 <a:solidFill>
                   <a:srgbClr val="555555"/>
                 </a:solidFill>
                 <a:latin typeface="微软雅黑"/>
                 <a:ea typeface="微软雅黑"/>
               </a:rPr>
-              <a:t>错误处理·内存模型</a:t>
-            </a:r>
-          </a:p>
-        </p:txBody>
-      </p:sp>
-      <p:sp>
-        <p:nvSpPr>
-          <p:cNvPr id="41" name="Rounded Rectangle 40"/>
+              <a:t>编码规范·架构约束·API约束</a:t>
+            </a:r>
+          </a:p>
+        </p:txBody>
+      </p:sp>
+      <p:sp>
+        <p:nvSpPr>
+          <p:cNvPr id="42" name="Rounded Rectangle 41"/>
           <p:cNvSpPr/>
           <p:nvPr/>
         </p:nvSpPr>
         <p:spPr>
           <a:xfrm>
-            <a:off x="3314700" y="3581400"/>
-            <a:ext cx="1200150" cy="304800"/>
+            <a:off x="3257550" y="3600450"/>
+            <a:ext cx="1200150" cy="342900"/>
           </a:xfrm>
           <a:prstGeom prst="roundRect">
             <a:avLst>
@@ -6242,10 +6325,11 @@
           <a:solidFill>
             <a:srgbClr val="FFFFFF"/>
           </a:solidFill>
-          <a:ln w="9525">
+          <a:ln w="12700">
             <a:solidFill>
-              <a:srgbClr val="9999FF"/>
+              <a:srgbClr val="C00000"/>
             </a:solidFill>
+            <a:prstDash val="dash"/>
           </a:ln>
           <a:effectLst/>
         </p:spPr>
@@ -6273,13 +6357,13 @@
       </p:sp>
       <p:sp>
         <p:nvSpPr>
-          <p:cNvPr id="42" name="TextBox 41"/>
+          <p:cNvPr id="43" name="TextBox 42"/>
           <p:cNvSpPr txBox="1"/>
           <p:nvPr/>
         </p:nvSpPr>
         <p:spPr>
           <a:xfrm>
-            <a:off x="3314700" y="3600450"/>
+            <a:off x="3257550" y="3629025"/>
             <a:ext cx="1200150" cy="133350"/>
           </a:xfrm>
           <a:prstGeom prst="rect">
@@ -6302,27 +6386,27 @@
               </a:spcAft>
             </a:pPr>
             <a:r>
-              <a:rPr sz="800" b="0">
-                <a:solidFill>
-                  <a:srgbClr val="000000"/>
-                </a:solidFill>
-                <a:latin typeface="微软雅黑"/>
-                <a:ea typeface="微软雅黑"/>
-              </a:rPr>
-              <a:t>pitfalls/ 坑清单</a:t>
-            </a:r>
-          </a:p>
-        </p:txBody>
-      </p:sp>
-      <p:sp>
-        <p:nvSpPr>
-          <p:cNvPr id="43" name="TextBox 42"/>
+              <a:rPr sz="750" b="1">
+                <a:solidFill>
+                  <a:srgbClr val="C00000"/>
+                </a:solidFill>
+                <a:latin typeface="微软雅黑"/>
+                <a:ea typeface="微软雅黑"/>
+              </a:rPr>
+              <a:t>代码知识 → 结构层</a:t>
+            </a:r>
+          </a:p>
+        </p:txBody>
+      </p:sp>
+      <p:sp>
+        <p:nvSpPr>
+          <p:cNvPr id="44" name="TextBox 43"/>
           <p:cNvSpPr txBox="1"/>
           <p:nvPr/>
         </p:nvSpPr>
         <p:spPr>
           <a:xfrm>
-            <a:off x="3314700" y="3733800"/>
+            <a:off x="3257550" y="3781425"/>
             <a:ext cx="1200150" cy="133350"/>
           </a:xfrm>
           <a:prstGeom prst="rect">
@@ -6345,28 +6429,28 @@
               </a:spcAft>
             </a:pPr>
             <a:r>
-              <a:rPr sz="700" b="0">
+              <a:rPr sz="650" b="0">
                 <a:solidFill>
                   <a:srgbClr val="C00000"/>
                 </a:solidFill>
                 <a:latin typeface="微软雅黑"/>
                 <a:ea typeface="微软雅黑"/>
               </a:rPr>
-              <a:t>Agent 犯错后回写</a:t>
-            </a:r>
-          </a:p>
-        </p:txBody>
-      </p:sp>
-      <p:sp>
-        <p:nvSpPr>
-          <p:cNvPr id="44" name="Rounded Rectangle 43"/>
+              <a:t>符号·引用·类型层次·调用图</a:t>
+            </a:r>
+          </a:p>
+        </p:txBody>
+      </p:sp>
+      <p:sp>
+        <p:nvSpPr>
+          <p:cNvPr id="45" name="Rounded Rectangle 44"/>
           <p:cNvSpPr/>
           <p:nvPr/>
         </p:nvSpPr>
         <p:spPr>
           <a:xfrm>
-            <a:off x="704850" y="3962400"/>
-            <a:ext cx="3543300" cy="247650"/>
+            <a:off x="704850" y="4019550"/>
+            <a:ext cx="3543300" cy="228600"/>
           </a:xfrm>
           <a:prstGeom prst="roundRect">
             <a:avLst>
@@ -6408,13 +6492,13 @@
       </p:sp>
       <p:sp>
         <p:nvSpPr>
-          <p:cNvPr id="45" name="TextBox 44"/>
+          <p:cNvPr id="46" name="TextBox 45"/>
           <p:cNvSpPr txBox="1"/>
           <p:nvPr/>
         </p:nvSpPr>
         <p:spPr>
           <a:xfrm>
-            <a:off x="704850" y="4000500"/>
+            <a:off x="704850" y="4048125"/>
             <a:ext cx="3543300" cy="152400"/>
           </a:xfrm>
           <a:prstGeom prst="rect">
@@ -6449,9 +6533,47 @@
           </a:p>
         </p:txBody>
       </p:sp>
-      <p:sp>
-        <p:nvSpPr>
-          <p:cNvPr id="46" name="Rounded Rectangle 45"/>
+      <p:cxnSp>
+        <p:nvCxnSpPr>
+          <p:cNvPr id="47" name="Connector 46"/>
+          <p:cNvCxnSpPr/>
+          <p:nvPr/>
+        </p:nvCxnSpPr>
+        <p:spPr>
+          <a:xfrm>
+            <a:off x="4476750" y="3771900"/>
+            <a:ext cx="228600" cy="0"/>
+          </a:xfrm>
+          <a:prstGeom prst="line">
+            <a:avLst/>
+          </a:prstGeom>
+          <a:ln w="15875">
+            <a:solidFill>
+              <a:srgbClr val="C00000"/>
+            </a:solidFill>
+            <a:prstDash val="dash"/>
+            <a:tailEnd type="triangle" w="med" len="med"/>
+          </a:ln>
+          <a:effectLst/>
+        </p:spPr>
+        <p:style>
+          <a:lnRef idx="2">
+            <a:schemeClr val="accent1"/>
+          </a:lnRef>
+          <a:fillRef idx="0">
+            <a:schemeClr val="accent1"/>
+          </a:fillRef>
+          <a:effectRef idx="1">
+            <a:schemeClr val="accent1"/>
+          </a:effectRef>
+          <a:fontRef idx="minor">
+            <a:schemeClr val="tx1"/>
+          </a:fontRef>
+        </p:style>
+      </p:cxnSp>
+      <p:sp>
+        <p:nvSpPr>
+          <p:cNvPr id="48" name="Rounded Rectangle 47"/>
           <p:cNvSpPr/>
           <p:nvPr/>
         </p:nvSpPr>
@@ -6499,7 +6621,7 @@
       </p:sp>
       <p:sp>
         <p:nvSpPr>
-          <p:cNvPr id="47" name="TextBox 46"/>
+          <p:cNvPr id="49" name="TextBox 48"/>
           <p:cNvSpPr txBox="1"/>
           <p:nvPr/>
         </p:nvSpPr>
@@ -6528,28 +6650,28 @@
               </a:spcAft>
             </a:pPr>
             <a:r>
-              <a:rPr sz="1050" b="1">
+              <a:rPr sz="1000" b="1">
                 <a:solidFill>
                   <a:srgbClr val="C00000"/>
                 </a:solidFill>
                 <a:latin typeface="微软雅黑"/>
                 <a:ea typeface="微软雅黑"/>
               </a:rPr>
-              <a:t>结构层｜MCP 工具按需调用</a:t>
-            </a:r>
-          </a:p>
-        </p:txBody>
-      </p:sp>
-      <p:sp>
-        <p:nvSpPr>
-          <p:cNvPr id="48" name="Rounded Rectangle 47"/>
+              <a:t>结构层｜代码知识（MCP 调用）</a:t>
+            </a:r>
+          </a:p>
+        </p:txBody>
+      </p:sp>
+      <p:sp>
+        <p:nvSpPr>
+          <p:cNvPr id="50" name="Rounded Rectangle 49"/>
           <p:cNvSpPr/>
           <p:nvPr/>
         </p:nvSpPr>
         <p:spPr>
           <a:xfrm>
-            <a:off x="4857750" y="3200400"/>
-            <a:ext cx="1943100" cy="419100"/>
+            <a:off x="4857750" y="3181350"/>
+            <a:ext cx="1943100" cy="381000"/>
           </a:xfrm>
           <a:prstGeom prst="roundRect">
             <a:avLst>
@@ -6590,13 +6712,13 @@
       </p:sp>
       <p:sp>
         <p:nvSpPr>
-          <p:cNvPr id="49" name="TextBox 48"/>
+          <p:cNvPr id="51" name="TextBox 50"/>
           <p:cNvSpPr txBox="1"/>
           <p:nvPr/>
         </p:nvSpPr>
         <p:spPr>
           <a:xfrm>
-            <a:off x="4857750" y="3238500"/>
+            <a:off x="4857750" y="3219450"/>
             <a:ext cx="1943100" cy="152400"/>
           </a:xfrm>
           <a:prstGeom prst="rect">
@@ -6619,7 +6741,7 @@
               </a:spcAft>
             </a:pPr>
             <a:r>
-              <a:rPr sz="1000" b="1">
+              <a:rPr sz="950" b="1">
                 <a:solidFill>
                   <a:srgbClr val="000000"/>
                 </a:solidFill>
@@ -6633,13 +6755,13 @@
       </p:sp>
       <p:sp>
         <p:nvSpPr>
-          <p:cNvPr id="50" name="TextBox 49"/>
+          <p:cNvPr id="52" name="TextBox 51"/>
           <p:cNvSpPr txBox="1"/>
           <p:nvPr/>
         </p:nvSpPr>
         <p:spPr>
           <a:xfrm>
-            <a:off x="4857750" y="3409950"/>
+            <a:off x="4857750" y="3371850"/>
             <a:ext cx="1943100" cy="152400"/>
           </a:xfrm>
           <a:prstGeom prst="rect">
@@ -6676,13 +6798,13 @@
       </p:sp>
       <p:sp>
         <p:nvSpPr>
-          <p:cNvPr id="51" name="Rounded Rectangle 50"/>
+          <p:cNvPr id="53" name="Rounded Rectangle 52"/>
           <p:cNvSpPr/>
           <p:nvPr/>
         </p:nvSpPr>
         <p:spPr>
           <a:xfrm>
-            <a:off x="4857750" y="3695700"/>
+            <a:off x="4857750" y="3638550"/>
             <a:ext cx="933450" cy="228600"/>
           </a:xfrm>
           <a:prstGeom prst="roundRect">
@@ -6722,13 +6844,13 @@
       </p:sp>
       <p:sp>
         <p:nvSpPr>
-          <p:cNvPr id="52" name="TextBox 51"/>
+          <p:cNvPr id="54" name="TextBox 53"/>
           <p:cNvSpPr txBox="1"/>
           <p:nvPr/>
         </p:nvSpPr>
         <p:spPr>
           <a:xfrm>
-            <a:off x="4857750" y="3733800"/>
+            <a:off x="4857750" y="3676650"/>
             <a:ext cx="933450" cy="152400"/>
           </a:xfrm>
           <a:prstGeom prst="rect">
@@ -6758,20 +6880,20 @@
                 <a:latin typeface="微软雅黑"/>
                 <a:ea typeface="微软雅黑"/>
               </a:rPr>
-              <a:t>find_definition</a:t>
-            </a:r>
-          </a:p>
-        </p:txBody>
-      </p:sp>
-      <p:sp>
-        <p:nvSpPr>
-          <p:cNvPr id="53" name="Rounded Rectangle 52"/>
+              <a:t>符号索引</a:t>
+            </a:r>
+          </a:p>
+        </p:txBody>
+      </p:sp>
+      <p:sp>
+        <p:nvSpPr>
+          <p:cNvPr id="55" name="Rounded Rectangle 54"/>
           <p:cNvSpPr/>
           <p:nvPr/>
         </p:nvSpPr>
         <p:spPr>
           <a:xfrm>
-            <a:off x="5867400" y="3695700"/>
+            <a:off x="5867400" y="3638550"/>
             <a:ext cx="933450" cy="228600"/>
           </a:xfrm>
           <a:prstGeom prst="roundRect">
@@ -6811,13 +6933,13 @@
       </p:sp>
       <p:sp>
         <p:nvSpPr>
-          <p:cNvPr id="54" name="TextBox 53"/>
+          <p:cNvPr id="56" name="TextBox 55"/>
           <p:cNvSpPr txBox="1"/>
           <p:nvPr/>
         </p:nvSpPr>
         <p:spPr>
           <a:xfrm>
-            <a:off x="5867400" y="3733800"/>
+            <a:off x="5867400" y="3676650"/>
             <a:ext cx="933450" cy="152400"/>
           </a:xfrm>
           <a:prstGeom prst="rect">
@@ -6847,21 +6969,67 @@
                 <a:latin typeface="微软雅黑"/>
                 <a:ea typeface="微软雅黑"/>
               </a:rPr>
-              <a:t>find_references</a:t>
-            </a:r>
-          </a:p>
-        </p:txBody>
-      </p:sp>
-      <p:sp>
-        <p:nvSpPr>
-          <p:cNvPr id="55" name="TextBox 54"/>
+              <a:t>跨文件引用</a:t>
+            </a:r>
+          </a:p>
+        </p:txBody>
+      </p:sp>
+      <p:sp>
+        <p:nvSpPr>
+          <p:cNvPr id="57" name="Rounded Rectangle 56"/>
+          <p:cNvSpPr/>
+          <p:nvPr/>
+        </p:nvSpPr>
+        <p:spPr>
+          <a:xfrm>
+            <a:off x="4857750" y="3924300"/>
+            <a:ext cx="933450" cy="228600"/>
+          </a:xfrm>
+          <a:prstGeom prst="roundRect">
+            <a:avLst>
+              <a:gd name="adj" fmla="val 8000"/>
+            </a:avLst>
+          </a:prstGeom>
+          <a:solidFill>
+            <a:srgbClr val="F2F2F2"/>
+          </a:solidFill>
+          <a:ln>
+            <a:noFill/>
+          </a:ln>
+          <a:effectLst/>
+        </p:spPr>
+        <p:style>
+          <a:lnRef idx="1">
+            <a:schemeClr val="accent1"/>
+          </a:lnRef>
+          <a:fillRef idx="3">
+            <a:schemeClr val="accent1"/>
+          </a:fillRef>
+          <a:effectRef idx="2">
+            <a:schemeClr val="accent1"/>
+          </a:effectRef>
+          <a:fontRef idx="minor">
+            <a:schemeClr val="lt1"/>
+          </a:fontRef>
+        </p:style>
+        <p:txBody>
+          <a:bodyPr rtlCol="0" anchor="ctr" lIns="0" rIns="0"/>
+          <a:lstStyle/>
+          <a:p>
+            <a:pPr algn="ctr"/>
+          </a:p>
+        </p:txBody>
+      </p:sp>
+      <p:sp>
+        <p:nvSpPr>
+          <p:cNvPr id="58" name="TextBox 57"/>
           <p:cNvSpPr txBox="1"/>
           <p:nvPr/>
         </p:nvSpPr>
         <p:spPr>
           <a:xfrm>
-            <a:off x="4857750" y="4038600"/>
-            <a:ext cx="1943100" cy="285750"/>
+            <a:off x="4857750" y="3962400"/>
+            <a:ext cx="933450" cy="152400"/>
           </a:xfrm>
           <a:prstGeom prst="rect">
             <a:avLst/>
@@ -6883,21 +7051,153 @@
               </a:spcAft>
             </a:pPr>
             <a:r>
-              <a:rPr sz="850" b="0">
+              <a:rPr sz="800" b="0">
+                <a:solidFill>
+                  <a:srgbClr val="000000"/>
+                </a:solidFill>
+                <a:latin typeface="微软雅黑"/>
+                <a:ea typeface="微软雅黑"/>
+              </a:rPr>
+              <a:t>类型层次结构</a:t>
+            </a:r>
+          </a:p>
+        </p:txBody>
+      </p:sp>
+      <p:sp>
+        <p:nvSpPr>
+          <p:cNvPr id="59" name="Rounded Rectangle 58"/>
+          <p:cNvSpPr/>
+          <p:nvPr/>
+        </p:nvSpPr>
+        <p:spPr>
+          <a:xfrm>
+            <a:off x="5867400" y="3924300"/>
+            <a:ext cx="933450" cy="228600"/>
+          </a:xfrm>
+          <a:prstGeom prst="roundRect">
+            <a:avLst>
+              <a:gd name="adj" fmla="val 8000"/>
+            </a:avLst>
+          </a:prstGeom>
+          <a:solidFill>
+            <a:srgbClr val="F2F2F2"/>
+          </a:solidFill>
+          <a:ln>
+            <a:noFill/>
+          </a:ln>
+          <a:effectLst/>
+        </p:spPr>
+        <p:style>
+          <a:lnRef idx="1">
+            <a:schemeClr val="accent1"/>
+          </a:lnRef>
+          <a:fillRef idx="3">
+            <a:schemeClr val="accent1"/>
+          </a:fillRef>
+          <a:effectRef idx="2">
+            <a:schemeClr val="accent1"/>
+          </a:effectRef>
+          <a:fontRef idx="minor">
+            <a:schemeClr val="lt1"/>
+          </a:fontRef>
+        </p:style>
+        <p:txBody>
+          <a:bodyPr rtlCol="0" anchor="ctr" lIns="0" rIns="0"/>
+          <a:lstStyle/>
+          <a:p>
+            <a:pPr algn="ctr"/>
+          </a:p>
+        </p:txBody>
+      </p:sp>
+      <p:sp>
+        <p:nvSpPr>
+          <p:cNvPr id="60" name="TextBox 59"/>
+          <p:cNvSpPr txBox="1"/>
+          <p:nvPr/>
+        </p:nvSpPr>
+        <p:spPr>
+          <a:xfrm>
+            <a:off x="5867400" y="3962400"/>
+            <a:ext cx="933450" cy="152400"/>
+          </a:xfrm>
+          <a:prstGeom prst="rect">
+            <a:avLst/>
+          </a:prstGeom>
+          <a:noFill/>
+        </p:spPr>
+        <p:txBody>
+          <a:bodyPr wrap="square" anchor="t" lIns="0" rIns="0" tIns="0" bIns="0">
+            <a:spAutoFit/>
+          </a:bodyPr>
+          <a:lstStyle/>
+          <a:p>
+            <a:pPr algn="ctr">
+              <a:lnSpc>
+                <a:spcPct val="125000"/>
+              </a:lnSpc>
+              <a:spcAft>
+                <a:spcPts val="200"/>
+              </a:spcAft>
+            </a:pPr>
+            <a:r>
+              <a:rPr sz="800" b="0">
+                <a:solidFill>
+                  <a:srgbClr val="000000"/>
+                </a:solidFill>
+                <a:latin typeface="微软雅黑"/>
+                <a:ea typeface="微软雅黑"/>
+              </a:rPr>
+              <a:t>调用图</a:t>
+            </a:r>
+          </a:p>
+        </p:txBody>
+      </p:sp>
+      <p:sp>
+        <p:nvSpPr>
+          <p:cNvPr id="61" name="TextBox 60"/>
+          <p:cNvSpPr txBox="1"/>
+          <p:nvPr/>
+        </p:nvSpPr>
+        <p:spPr>
+          <a:xfrm>
+            <a:off x="4857750" y="4248150"/>
+            <a:ext cx="1943100" cy="247650"/>
+          </a:xfrm>
+          <a:prstGeom prst="rect">
+            <a:avLst/>
+          </a:prstGeom>
+          <a:noFill/>
+        </p:spPr>
+        <p:txBody>
+          <a:bodyPr wrap="square" anchor="t" lIns="0" rIns="0" tIns="0" bIns="0">
+            <a:spAutoFit/>
+          </a:bodyPr>
+          <a:lstStyle/>
+          <a:p>
+            <a:pPr algn="ctr">
+              <a:lnSpc>
+                <a:spcPct val="125000"/>
+              </a:lnSpc>
+              <a:spcAft>
+                <a:spcPts val="200"/>
+              </a:spcAft>
+            </a:pPr>
+            <a:r>
+              <a:rPr sz="800" b="0">
                 <a:solidFill>
                   <a:srgbClr val="0000FF"/>
                 </a:solidFill>
                 <a:latin typeface="微软雅黑"/>
                 <a:ea typeface="微软雅黑"/>
               </a:rPr>
-              <a:t>编译器级精度，C/C++ 图谱最优解</a:t>
-            </a:r>
-          </a:p>
-        </p:txBody>
-      </p:sp>
-      <p:sp>
-        <p:nvSpPr>
-          <p:cNvPr id="56" name="Rounded Rectangle 55"/>
+              <a:t>编译器级精度 · 实时派生 · 不落 Markdown</a:t>
+            </a:r>
+          </a:p>
+        </p:txBody>
+      </p:sp>
+      <p:sp>
+        <p:nvSpPr>
+          <p:cNvPr id="62" name="Rounded Rectangle 61"/>
           <p:cNvSpPr/>
           <p:nvPr/>
         </p:nvSpPr>
@@ -6946,7 +7246,7 @@
       </p:sp>
       <p:sp>
         <p:nvSpPr>
-          <p:cNvPr id="57" name="TextBox 56"/>
+          <p:cNvPr id="63" name="TextBox 62"/>
           <p:cNvSpPr txBox="1"/>
           <p:nvPr/>
         </p:nvSpPr>
@@ -6989,7 +7289,7 @@
       </p:sp>
       <p:sp>
         <p:nvSpPr>
-          <p:cNvPr id="58" name="TextBox 57"/>
+          <p:cNvPr id="64" name="TextBox 63"/>
           <p:cNvSpPr txBox="1"/>
           <p:nvPr/>
         </p:nvSpPr>
@@ -7032,7 +7332,7 @@
       </p:sp>
       <p:sp>
         <p:nvSpPr>
-          <p:cNvPr id="59" name="Rounded Rectangle 58"/>
+          <p:cNvPr id="65" name="Rounded Rectangle 64"/>
           <p:cNvSpPr/>
           <p:nvPr/>
         </p:nvSpPr>
@@ -7080,7 +7380,7 @@
       </p:sp>
       <p:sp>
         <p:nvSpPr>
-          <p:cNvPr id="60" name="TextBox 59"/>
+          <p:cNvPr id="66" name="TextBox 65"/>
           <p:cNvSpPr txBox="1"/>
           <p:nvPr/>
         </p:nvSpPr>
@@ -7123,7 +7423,7 @@
       </p:sp>
       <p:sp>
         <p:nvSpPr>
-          <p:cNvPr id="61" name="TextBox 60"/>
+          <p:cNvPr id="67" name="TextBox 66"/>
           <p:cNvSpPr txBox="1"/>
           <p:nvPr/>
         </p:nvSpPr>
@@ -7166,7 +7466,7 @@
       </p:sp>
       <p:sp>
         <p:nvSpPr>
-          <p:cNvPr id="62" name="Rounded Rectangle 61"/>
+          <p:cNvPr id="68" name="Rounded Rectangle 67"/>
           <p:cNvSpPr/>
           <p:nvPr/>
         </p:nvSpPr>
@@ -7214,7 +7514,7 @@
       </p:sp>
       <p:sp>
         <p:nvSpPr>
-          <p:cNvPr id="63" name="Rectangle 62"/>
+          <p:cNvPr id="69" name="Rectangle 68"/>
           <p:cNvSpPr/>
           <p:nvPr/>
         </p:nvSpPr>
@@ -7258,7 +7558,7 @@
       </p:sp>
       <p:sp>
         <p:nvSpPr>
-          <p:cNvPr id="64" name="TextBox 63"/>
+          <p:cNvPr id="70" name="TextBox 69"/>
           <p:cNvSpPr txBox="1"/>
           <p:nvPr/>
         </p:nvSpPr>
@@ -7301,7 +7601,7 @@
       </p:sp>
       <p:sp>
         <p:nvSpPr>
-          <p:cNvPr id="65" name="TextBox 64"/>
+          <p:cNvPr id="71" name="TextBox 70"/>
           <p:cNvSpPr txBox="1"/>
           <p:nvPr/>
         </p:nvSpPr>
@@ -7494,14 +7794,14 @@
       </p:sp>
       <p:sp>
         <p:nvSpPr>
-          <p:cNvPr id="66" name="Rounded Rectangle 65"/>
+          <p:cNvPr id="72" name="Rounded Rectangle 71"/>
           <p:cNvSpPr/>
           <p:nvPr/>
         </p:nvSpPr>
         <p:spPr>
           <a:xfrm>
             <a:off x="7239000" y="3314700"/>
-            <a:ext cx="4533900" cy="1314450"/>
+            <a:ext cx="4533900" cy="1447800"/>
           </a:xfrm>
           <a:prstGeom prst="roundRect">
             <a:avLst>
@@ -7542,7 +7842,7 @@
       </p:sp>
       <p:sp>
         <p:nvSpPr>
-          <p:cNvPr id="67" name="Rectangle 66"/>
+          <p:cNvPr id="73" name="Rectangle 72"/>
           <p:cNvSpPr/>
           <p:nvPr/>
         </p:nvSpPr>
@@ -7586,7 +7886,7 @@
       </p:sp>
       <p:sp>
         <p:nvSpPr>
-          <p:cNvPr id="68" name="TextBox 67"/>
+          <p:cNvPr id="74" name="TextBox 73"/>
           <p:cNvSpPr txBox="1"/>
           <p:nvPr/>
         </p:nvSpPr>
@@ -7622,21 +7922,21 @@
                 <a:latin typeface="微软雅黑"/>
                 <a:ea typeface="微软雅黑"/>
               </a:rPr>
-              <a:t>知识四缺口 → 层的映射</a:t>
-            </a:r>
-          </a:p>
-        </p:txBody>
-      </p:sp>
-      <p:sp>
-        <p:nvSpPr>
-          <p:cNvPr id="69" name="TextBox 68"/>
+              <a:t>五类基础知识 → 层的映射</a:t>
+            </a:r>
+          </a:p>
+        </p:txBody>
+      </p:sp>
+      <p:sp>
+        <p:nvSpPr>
+          <p:cNvPr id="75" name="TextBox 74"/>
           <p:cNvSpPr txBox="1"/>
           <p:nvPr/>
         </p:nvSpPr>
         <p:spPr>
           <a:xfrm>
             <a:off x="7372350" y="3657600"/>
-            <a:ext cx="4267200" cy="914400"/>
+            <a:ext cx="4267200" cy="1066800"/>
           </a:xfrm>
           <a:prstGeom prst="rect">
             <a:avLst/>
@@ -7668,17 +7968,17 @@
               <a:t>● </a:t>
             </a:r>
             <a:r>
-              <a:rPr sz="1000" b="0">
+              <a:rPr sz="950" b="0">
                 <a:solidFill>
                   <a:srgbClr val="000000"/>
                 </a:solidFill>
                 <a:latin typeface="微软雅黑"/>
                 <a:ea typeface="微软雅黑"/>
               </a:rPr>
-              <a:t>业务背景 → </a:t>
-            </a:r>
-            <a:r>
-              <a:rPr sz="1000" b="1">
+              <a:t>领域知识 → </a:t>
+            </a:r>
+            <a:r>
+              <a:rPr sz="950" b="1">
                 <a:solidFill>
                   <a:srgbClr val="000000"/>
                 </a:solidFill>
@@ -7687,6 +7987,16 @@
               </a:rPr>
               <a:t>知识层 domain/</a:t>
             </a:r>
+            <a:r>
+              <a:rPr sz="950" b="0">
+                <a:solidFill>
+                  <a:srgbClr val="000000"/>
+                </a:solidFill>
+                <a:latin typeface="微软雅黑"/>
+                <a:ea typeface="微软雅黑"/>
+              </a:rPr>
+              <a:t>（业务·术语·产品手册）</a:t>
+            </a:r>
           </a:p>
           <a:p>
             <a:pPr algn="l">
@@ -7708,17 +8018,17 @@
               <a:t>● </a:t>
             </a:r>
             <a:r>
-              <a:rPr sz="1000" b="0">
+              <a:rPr sz="950" b="0">
                 <a:solidFill>
                   <a:srgbClr val="000000"/>
                 </a:solidFill>
                 <a:latin typeface="微软雅黑"/>
                 <a:ea typeface="微软雅黑"/>
               </a:rPr>
-              <a:t>架构信息 → </a:t>
-            </a:r>
-            <a:r>
-              <a:rPr sz="1000" b="1">
+              <a:t>架构知识 → </a:t>
+            </a:r>
+            <a:r>
+              <a:rPr sz="950" b="1">
                 <a:solidFill>
                   <a:srgbClr val="000000"/>
                 </a:solidFill>
@@ -7728,14 +8038,14 @@
               <a:t>知识层 architecture/</a:t>
             </a:r>
             <a:r>
-              <a:rPr sz="1000" b="0">
+              <a:rPr sz="950" b="0">
                 <a:solidFill>
                   <a:srgbClr val="000000"/>
                 </a:solidFill>
                 <a:latin typeface="微软雅黑"/>
                 <a:ea typeface="微软雅黑"/>
               </a:rPr>
-              <a:t> + 结构层</a:t>
+              <a:t>（架构/特性/实现设计）</a:t>
             </a:r>
           </a:p>
           <a:p>
@@ -7758,25 +8068,85 @@
               <a:t>● </a:t>
             </a:r>
             <a:r>
-              <a:rPr sz="1000" b="0">
+              <a:rPr sz="950" b="0">
                 <a:solidFill>
                   <a:srgbClr val="000000"/>
                 </a:solidFill>
                 <a:latin typeface="微软雅黑"/>
                 <a:ea typeface="微软雅黑"/>
               </a:rPr>
-              <a:t>编码约束 → </a:t>
-            </a:r>
-            <a:r>
-              <a:rPr sz="1000" b="1">
+              <a:t>决策知识 → </a:t>
+            </a:r>
+            <a:r>
+              <a:rPr sz="950" b="1">
                 <a:solidFill>
                   <a:srgbClr val="000000"/>
                 </a:solidFill>
                 <a:latin typeface="微软雅黑"/>
                 <a:ea typeface="微软雅黑"/>
               </a:rPr>
+              <a:t>知识层 decisions/</a:t>
+            </a:r>
+            <a:r>
+              <a:rPr sz="950" b="0">
+                <a:solidFill>
+                  <a:srgbClr val="000000"/>
+                </a:solidFill>
+                <a:latin typeface="微软雅黑"/>
+                <a:ea typeface="微软雅黑"/>
+              </a:rPr>
+              <a:t>（CCB/NodePC/DRB）</a:t>
+            </a:r>
+          </a:p>
+          <a:p>
+            <a:pPr algn="l">
+              <a:lnSpc>
+                <a:spcPct val="130000"/>
+              </a:lnSpc>
+              <a:spcAft>
+                <a:spcPts val="200"/>
+              </a:spcAft>
+            </a:pPr>
+            <a:r>
+              <a:rPr sz="600" b="0">
+                <a:solidFill>
+                  <a:srgbClr val="C00000"/>
+                </a:solidFill>
+                <a:latin typeface="微软雅黑"/>
+                <a:ea typeface="微软雅黑"/>
+              </a:rPr>
+              <a:t>● </a:t>
+            </a:r>
+            <a:r>
+              <a:rPr sz="950" b="0">
+                <a:solidFill>
+                  <a:srgbClr val="000000"/>
+                </a:solidFill>
+                <a:latin typeface="微软雅黑"/>
+                <a:ea typeface="微软雅黑"/>
+              </a:rPr>
+              <a:t>规范与约束 → </a:t>
+            </a:r>
+            <a:r>
+              <a:rPr sz="950" b="1">
+                <a:solidFill>
+                  <a:srgbClr val="000000"/>
+                </a:solidFill>
+                <a:latin typeface="微软雅黑"/>
+                <a:ea typeface="微软雅黑"/>
+              </a:rPr>
               <a:t>宪法层 + conventions/</a:t>
             </a:r>
+            <a:r>
+              <a:rPr sz="950" b="0">
+                <a:solidFill>
+                  <a:srgbClr val="000000"/>
+                </a:solidFill>
+                <a:latin typeface="微软雅黑"/>
+                <a:ea typeface="微软雅黑"/>
+              </a:rPr>
+              <a:t>（公司/领域规范·API约束）</a:t>
+            </a:r>
           </a:p>
           <a:p>
             <a:pPr algn="l">
@@ -7798,38 +8168,68 @@
               <a:t>● </a:t>
             </a:r>
             <a:r>
-              <a:rPr sz="1000" b="0">
+              <a:rPr sz="950" b="0">
                 <a:solidFill>
                   <a:srgbClr val="000000"/>
                 </a:solidFill>
                 <a:latin typeface="微软雅黑"/>
                 <a:ea typeface="微软雅黑"/>
               </a:rPr>
-              <a:t>代码事实 → </a:t>
-            </a:r>
-            <a:r>
-              <a:rPr sz="1000" b="1">
+              <a:t>代码知识 → </a:t>
+            </a:r>
+            <a:r>
+              <a:rPr sz="950" b="1">
                 <a:solidFill>
                   <a:srgbClr val="000000"/>
                 </a:solidFill>
                 <a:latin typeface="微软雅黑"/>
                 <a:ea typeface="微软雅黑"/>
               </a:rPr>
-              <a:t>结构层 clangd + grep</a:t>
-            </a:r>
-          </a:p>
-        </p:txBody>
-      </p:sp>
-      <p:sp>
-        <p:nvSpPr>
-          <p:cNvPr id="70" name="Rounded Rectangle 69"/>
+              <a:t>结构层 clangd/LSP</a:t>
+            </a:r>
+            <a:r>
+              <a:rPr sz="950" b="0">
+                <a:solidFill>
+                  <a:srgbClr val="000000"/>
+                </a:solidFill>
+                <a:latin typeface="微软雅黑"/>
+                <a:ea typeface="微软雅黑"/>
+              </a:rPr>
+              <a:t>（</a:t>
+            </a:r>
+            <a:r>
+              <a:rPr sz="950" b="0">
+                <a:solidFill>
+                  <a:srgbClr val="0000FF"/>
+                </a:solidFill>
+                <a:latin typeface="微软雅黑"/>
+                <a:ea typeface="微软雅黑"/>
+              </a:rPr>
+              <a:t>实时派生，不写 Markdown</a:t>
+            </a:r>
+            <a:r>
+              <a:rPr sz="950" b="0">
+                <a:solidFill>
+                  <a:srgbClr val="000000"/>
+                </a:solidFill>
+                <a:latin typeface="微软雅黑"/>
+                <a:ea typeface="微软雅黑"/>
+              </a:rPr>
+              <a:t>）</a:t>
+            </a:r>
+          </a:p>
+        </p:txBody>
+      </p:sp>
+      <p:sp>
+        <p:nvSpPr>
+          <p:cNvPr id="76" name="Rounded Rectangle 75"/>
           <p:cNvSpPr/>
           <p:nvPr/>
         </p:nvSpPr>
         <p:spPr>
           <a:xfrm>
-            <a:off x="7239000" y="4743450"/>
-            <a:ext cx="4533900" cy="857250"/>
+            <a:off x="7239000" y="4876800"/>
+            <a:ext cx="4533900" cy="723900"/>
           </a:xfrm>
           <a:prstGeom prst="roundRect">
             <a:avLst>
@@ -7870,13 +8270,13 @@
       </p:sp>
       <p:sp>
         <p:nvSpPr>
-          <p:cNvPr id="71" name="Rounded Rectangle 70"/>
+          <p:cNvPr id="77" name="Rounded Rectangle 76"/>
           <p:cNvSpPr/>
           <p:nvPr/>
         </p:nvSpPr>
         <p:spPr>
           <a:xfrm>
-            <a:off x="7353300" y="4829175"/>
+            <a:off x="7353300" y="4962525"/>
             <a:ext cx="457200" cy="190500"/>
           </a:xfrm>
           <a:prstGeom prst="roundRect">
@@ -7926,14 +8326,14 @@
       </p:sp>
       <p:sp>
         <p:nvSpPr>
-          <p:cNvPr id="72" name="TextBox 71"/>
+          <p:cNvPr id="78" name="TextBox 77"/>
           <p:cNvSpPr txBox="1"/>
           <p:nvPr/>
         </p:nvSpPr>
         <p:spPr>
           <a:xfrm>
-            <a:off x="7905750" y="4819650"/>
-            <a:ext cx="3733800" cy="704850"/>
+            <a:off x="7905750" y="4953000"/>
+            <a:ext cx="3733800" cy="571500"/>
           </a:xfrm>
           <a:prstGeom prst="rect">
             <a:avLst/>
@@ -8228,7 +8628,7 @@
                 <a:latin typeface="微软雅黑"/>
                 <a:ea typeface="微软雅黑"/>
               </a:rPr>
-              <a:t>三个工作包按依赖递进——</a:t>
+              <a:t>落地为"</a:t>
             </a:r>
             <a:r>
               <a:rPr sz="1400" b="1">
@@ -8238,7 +8638,7 @@
                 <a:latin typeface="微软雅黑"/>
                 <a:ea typeface="微软雅黑"/>
               </a:rPr>
-              <a:t>存量资产组织化</a:t>
+              <a:t>知识源 → 知识库 → 知识测评 → 知识消费 → 知识调试</a:t>
             </a:r>
             <a:r>
               <a:rPr sz="1400" b="0">
@@ -8248,17 +8648,37 @@
                 <a:latin typeface="微软雅黑"/>
                 <a:ea typeface="微软雅黑"/>
               </a:rPr>
-              <a:t>（纯文档工作，立即见效）→ </a:t>
+              <a:t>"的闭环体系，</a:t>
             </a:r>
             <a:r>
               <a:rPr sz="1400" b="1">
                 <a:solidFill>
+                  <a:srgbClr val="0000FF"/>
+                </a:solidFill>
+                <a:latin typeface="微软雅黑"/>
+                <a:ea typeface="微软雅黑"/>
+              </a:rPr>
+              <a:t>四类触发器</a:t>
+            </a:r>
+            <a:r>
+              <a:rPr sz="1400" b="0">
+                <a:solidFill>
                   <a:srgbClr val="000000"/>
                 </a:solidFill>
                 <a:latin typeface="微软雅黑"/>
                 <a:ea typeface="微软雅黑"/>
               </a:rPr>
-              <a:t>C/C++ 结构层</a:t>
+              <a:t>（新知识源 / 测评发现问题 / 消费端反馈 / 调试追踪）驱动知识库持续刷新——知识库不是一次性工程，而是</a:t>
+            </a:r>
+            <a:r>
+              <a:rPr sz="1400" b="1">
+                <a:solidFill>
+                  <a:srgbClr val="000000"/>
+                </a:solidFill>
+                <a:latin typeface="微软雅黑"/>
+                <a:ea typeface="微软雅黑"/>
+              </a:rPr>
+              <a:t>带反馈回路的活系统</a:t>
             </a:r>
             <a:r>
               <a:rPr sz="1400" b="0">
@@ -8268,27 +8688,7 @@
                 <a:latin typeface="微软雅黑"/>
                 <a:ea typeface="微软雅黑"/>
               </a:rPr>
-              <a:t>（工程量小、价值高）→ </a:t>
-            </a:r>
-            <a:r>
-              <a:rPr sz="1400" b="1">
-                <a:solidFill>
-                  <a:srgbClr val="000000"/>
-                </a:solidFill>
-                <a:latin typeface="微软雅黑"/>
-                <a:ea typeface="微软雅黑"/>
-              </a:rPr>
-              <a:t>闭环与保鲜机制</a:t>
-            </a:r>
-            <a:r>
-              <a:rPr sz="1400" b="0">
-                <a:solidFill>
-                  <a:srgbClr val="000000"/>
-                </a:solidFill>
-                <a:latin typeface="微软雅黑"/>
-                <a:ea typeface="微软雅黑"/>
-              </a:rPr>
-              <a:t>（决定知识库存亡）；"一次写对"的天花板由第三个工作包决定。</a:t>
+              <a:t>。</a:t>
             </a:r>
           </a:p>
         </p:txBody>
@@ -8387,8 +8787,8 @@
         </p:nvSpPr>
         <p:spPr>
           <a:xfrm>
-            <a:off x="419100" y="1428750"/>
-            <a:ext cx="3657600" cy="2914650"/>
+            <a:off x="419100" y="1390650"/>
+            <a:ext cx="11353800" cy="2381250"/>
           </a:xfrm>
           <a:prstGeom prst="roundRect">
             <a:avLst>
@@ -8435,8 +8835,8 @@
         </p:nvSpPr>
         <p:spPr>
           <a:xfrm>
-            <a:off x="457200" y="1428750"/>
-            <a:ext cx="3581400" cy="38100"/>
+            <a:off x="552450" y="1533525"/>
+            <a:ext cx="76200" cy="76200"/>
           </a:xfrm>
           <a:prstGeom prst="rect">
             <a:avLst/>
@@ -8479,8 +8879,8 @@
         </p:nvSpPr>
         <p:spPr>
           <a:xfrm>
-            <a:off x="571500" y="1562100"/>
-            <a:ext cx="3352800" cy="190500"/>
+            <a:off x="685800" y="1466850"/>
+            <a:ext cx="6667500" cy="190500"/>
           </a:xfrm>
           <a:prstGeom prst="rect">
             <a:avLst/>
@@ -8502,313 +8902,41 @@
               </a:spcAft>
             </a:pPr>
             <a:r>
-              <a:rPr sz="1250" b="1">
+              <a:rPr sz="1200" b="1">
                 <a:solidFill>
                   <a:srgbClr val="000000"/>
                 </a:solidFill>
                 <a:latin typeface="微软雅黑"/>
                 <a:ea typeface="微软雅黑"/>
               </a:rPr>
-              <a:t>工作包① 存量资产组织化</a:t>
-            </a:r>
-          </a:p>
-        </p:txBody>
-      </p:sp>
-      <p:sp>
-        <p:nvSpPr>
-          <p:cNvPr id="12" name="TextBox 11"/>
-          <p:cNvSpPr txBox="1"/>
-          <p:nvPr/>
-        </p:nvSpPr>
-        <p:spPr>
-          <a:xfrm>
-            <a:off x="571500" y="1790700"/>
-            <a:ext cx="3352800" cy="152400"/>
-          </a:xfrm>
-          <a:prstGeom prst="rect">
-            <a:avLst/>
-          </a:prstGeom>
-          <a:noFill/>
-        </p:spPr>
-        <p:txBody>
-          <a:bodyPr wrap="square" anchor="t" lIns="0" rIns="0" tIns="0" bIns="0">
-            <a:spAutoFit/>
-          </a:bodyPr>
-          <a:lstStyle/>
-          <a:p>
-            <a:pPr algn="l">
-              <a:lnSpc>
-                <a:spcPct val="125000"/>
-              </a:lnSpc>
-              <a:spcAft>
-                <a:spcPts val="200"/>
-              </a:spcAft>
-            </a:pPr>
-            <a:r>
-              <a:rPr sz="950" b="1">
-                <a:solidFill>
-                  <a:srgbClr val="0000FF"/>
-                </a:solidFill>
-                <a:latin typeface="微软雅黑"/>
-                <a:ea typeface="微软雅黑"/>
-              </a:rPr>
-              <a:t>纯文档工作 · 零基础设施依赖</a:t>
-            </a:r>
-          </a:p>
-        </p:txBody>
-      </p:sp>
-      <p:sp>
-        <p:nvSpPr>
-          <p:cNvPr id="13" name="TextBox 12"/>
-          <p:cNvSpPr txBox="1"/>
-          <p:nvPr/>
-        </p:nvSpPr>
-        <p:spPr>
-          <a:xfrm>
-            <a:off x="571500" y="2000250"/>
-            <a:ext cx="3352800" cy="1809750"/>
-          </a:xfrm>
-          <a:prstGeom prst="rect">
-            <a:avLst/>
-          </a:prstGeom>
-          <a:noFill/>
-        </p:spPr>
-        <p:txBody>
-          <a:bodyPr wrap="square" anchor="t" lIns="0" rIns="0" tIns="0" bIns="0">
-            <a:spAutoFit/>
-          </a:bodyPr>
-          <a:lstStyle/>
-          <a:p>
-            <a:pPr algn="l">
-              <a:lnSpc>
-                <a:spcPct val="130000"/>
-              </a:lnSpc>
-              <a:spcAft>
-                <a:spcPts val="300"/>
-              </a:spcAft>
-            </a:pPr>
-            <a:r>
-              <a:rPr sz="600" b="0">
-                <a:solidFill>
-                  <a:srgbClr val="C00000"/>
-                </a:solidFill>
-                <a:latin typeface="微软雅黑"/>
-                <a:ea typeface="微软雅黑"/>
-              </a:rPr>
-              <a:t>● </a:t>
-            </a:r>
-            <a:r>
-              <a:rPr sz="950" b="0">
-                <a:solidFill>
-                  <a:srgbClr val="000000"/>
-                </a:solidFill>
-                <a:latin typeface="微软雅黑"/>
-                <a:ea typeface="微软雅黑"/>
-              </a:rPr>
-              <a:t>盘点 docs / specs / skills 存量，建 </a:t>
-            </a:r>
-            <a:r>
-              <a:rPr sz="950" b="1">
-                <a:solidFill>
-                  <a:srgbClr val="000000"/>
-                </a:solidFill>
-                <a:latin typeface="微软雅黑"/>
-                <a:ea typeface="微软雅黑"/>
-              </a:rPr>
-              <a:t>docs/wiki/ 目录树</a:t>
-            </a:r>
-          </a:p>
-          <a:p>
-            <a:pPr algn="l">
-              <a:lnSpc>
-                <a:spcPct val="130000"/>
-              </a:lnSpc>
-              <a:spcAft>
-                <a:spcPts val="300"/>
-              </a:spcAft>
-            </a:pPr>
-            <a:r>
-              <a:rPr sz="600" b="0">
-                <a:solidFill>
-                  <a:srgbClr val="C00000"/>
-                </a:solidFill>
-                <a:latin typeface="微软雅黑"/>
-                <a:ea typeface="微软雅黑"/>
-              </a:rPr>
-              <a:t>● </a:t>
-            </a:r>
-            <a:r>
-              <a:rPr sz="950" b="0">
-                <a:solidFill>
-                  <a:srgbClr val="000000"/>
-                </a:solidFill>
-                <a:latin typeface="微软雅黑"/>
-                <a:ea typeface="微软雅黑"/>
-              </a:rPr>
-              <a:t>编写 </a:t>
-            </a:r>
-            <a:r>
-              <a:rPr sz="950" b="1">
-                <a:solidFill>
-                  <a:srgbClr val="0000FF"/>
-                </a:solidFill>
-                <a:latin typeface="微软雅黑"/>
-                <a:ea typeface="微软雅黑"/>
-              </a:rPr>
-              <a:t>index.md 总目录</a:t>
-            </a:r>
-            <a:r>
-              <a:rPr sz="950" b="0">
-                <a:solidFill>
-                  <a:srgbClr val="000000"/>
-                </a:solidFill>
-                <a:latin typeface="微软雅黑"/>
-                <a:ea typeface="微软雅黑"/>
-              </a:rPr>
-              <a:t>：每页一行链接 + 一句话摘要（Karpathy 模式核心件）</a:t>
-            </a:r>
-          </a:p>
-          <a:p>
-            <a:pPr algn="l">
-              <a:lnSpc>
-                <a:spcPct val="130000"/>
-              </a:lnSpc>
-              <a:spcAft>
-                <a:spcPts val="300"/>
-              </a:spcAft>
-            </a:pPr>
-            <a:r>
-              <a:rPr sz="600" b="0">
-                <a:solidFill>
-                  <a:srgbClr val="C00000"/>
-                </a:solidFill>
-                <a:latin typeface="微软雅黑"/>
-                <a:ea typeface="微软雅黑"/>
-              </a:rPr>
-              <a:t>● </a:t>
-            </a:r>
-            <a:r>
-              <a:rPr sz="950" b="1">
-                <a:solidFill>
-                  <a:srgbClr val="000000"/>
-                </a:solidFill>
-                <a:latin typeface="微软雅黑"/>
-                <a:ea typeface="微软雅黑"/>
-              </a:rPr>
-              <a:t>CLAUDE.md 瘦身分层</a:t>
-            </a:r>
-            <a:r>
-              <a:rPr sz="950" b="0">
-                <a:solidFill>
-                  <a:srgbClr val="000000"/>
-                </a:solidFill>
-                <a:latin typeface="微软雅黑"/>
-                <a:ea typeface="微软雅黑"/>
-              </a:rPr>
-              <a:t>：根文件只留跨域硬约束 + 命令 + </a:t>
-            </a:r>
-            <a:r>
-              <a:rPr sz="950" b="1">
-                <a:solidFill>
-                  <a:srgbClr val="0000FF"/>
-                </a:solidFill>
-                <a:latin typeface="微软雅黑"/>
-                <a:ea typeface="微软雅黑"/>
-              </a:rPr>
-              <a:t>检索协议</a:t>
-            </a:r>
-          </a:p>
-          <a:p>
-            <a:pPr algn="l">
-              <a:lnSpc>
-                <a:spcPct val="130000"/>
-              </a:lnSpc>
-              <a:spcAft>
-                <a:spcPts val="300"/>
-              </a:spcAft>
-            </a:pPr>
-            <a:r>
-              <a:rPr sz="600" b="0">
-                <a:solidFill>
-                  <a:srgbClr val="C00000"/>
-                </a:solidFill>
-                <a:latin typeface="微软雅黑"/>
-                <a:ea typeface="微软雅黑"/>
-              </a:rPr>
-              <a:t>● </a:t>
-            </a:r>
-            <a:r>
-              <a:rPr sz="950" b="0">
-                <a:solidFill>
-                  <a:srgbClr val="000000"/>
-                </a:solidFill>
-                <a:latin typeface="微软雅黑"/>
-                <a:ea typeface="微软雅黑"/>
-              </a:rPr>
-              <a:t>deep-wiki 类 skill </a:t>
-            </a:r>
-            <a:r>
-              <a:rPr sz="950" b="1">
-                <a:solidFill>
-                  <a:srgbClr val="000000"/>
-                </a:solidFill>
-                <a:latin typeface="微软雅黑"/>
-                <a:ea typeface="微软雅黑"/>
-              </a:rPr>
-              <a:t>自动生成初稿</a:t>
-            </a:r>
-            <a:r>
-              <a:rPr sz="950" b="0">
-                <a:solidFill>
-                  <a:srgbClr val="000000"/>
-                </a:solidFill>
-                <a:latin typeface="微软雅黑"/>
-                <a:ea typeface="微软雅黑"/>
-              </a:rPr>
-              <a:t>，架构/约束页</a:t>
-            </a:r>
-            <a:r>
-              <a:rPr sz="950" b="1">
-                <a:solidFill>
-                  <a:srgbClr val="0000FF"/>
-                </a:solidFill>
-                <a:latin typeface="微软雅黑"/>
-                <a:ea typeface="微软雅黑"/>
-              </a:rPr>
-              <a:t>人工评审后</a:t>
-            </a:r>
-            <a:r>
-              <a:rPr sz="950" b="0">
-                <a:solidFill>
-                  <a:srgbClr val="000000"/>
-                </a:solidFill>
-                <a:latin typeface="微软雅黑"/>
-                <a:ea typeface="微软雅黑"/>
-              </a:rPr>
-              <a:t>收编</a:t>
-            </a:r>
-          </a:p>
-        </p:txBody>
-      </p:sp>
-      <p:sp>
-        <p:nvSpPr>
-          <p:cNvPr id="14" name="Rectangle 13"/>
+              <a:t>知识闭环体系（五个环节 + 刷新回路）</a:t>
+            </a:r>
+          </a:p>
+        </p:txBody>
+      </p:sp>
+      <p:sp>
+        <p:nvSpPr>
+          <p:cNvPr id="12" name="Rounded Rectangle 11"/>
           <p:cNvSpPr/>
           <p:nvPr/>
         </p:nvSpPr>
         <p:spPr>
           <a:xfrm>
-            <a:off x="533400" y="3943350"/>
-            <a:ext cx="3429000" cy="304800"/>
-          </a:xfrm>
-          <a:prstGeom prst="rect">
-            <a:avLst/>
+            <a:off x="552450" y="1771650"/>
+            <a:ext cx="2038350" cy="1104900"/>
+          </a:xfrm>
+          <a:prstGeom prst="roundRect">
+            <a:avLst>
+              <a:gd name="adj" fmla="val 8000"/>
+            </a:avLst>
           </a:prstGeom>
           <a:solidFill>
             <a:srgbClr val="F2F2F2"/>
           </a:solidFill>
-          <a:ln>
-            <a:noFill/>
+          <a:ln w="12700">
+            <a:solidFill>
+              <a:srgbClr val="999999"/>
+            </a:solidFill>
           </a:ln>
           <a:effectLst/>
         </p:spPr>
@@ -8827,7 +8955,7 @@
           </a:fontRef>
         </p:style>
         <p:txBody>
-          <a:bodyPr rtlCol="0" anchor="ctr"/>
+          <a:bodyPr rtlCol="0" anchor="ctr" lIns="0" rIns="0"/>
           <a:lstStyle/>
           <a:p>
             <a:pPr algn="ctr"/>
@@ -8836,14 +8964,14 @@
       </p:sp>
       <p:sp>
         <p:nvSpPr>
-          <p:cNvPr id="15" name="TextBox 14"/>
+          <p:cNvPr id="13" name="TextBox 12"/>
           <p:cNvSpPr txBox="1"/>
           <p:nvPr/>
         </p:nvSpPr>
         <p:spPr>
           <a:xfrm>
-            <a:off x="628650" y="3943350"/>
-            <a:ext cx="3238500" cy="304800"/>
+            <a:off x="552450" y="1828800"/>
+            <a:ext cx="2038350" cy="152400"/>
           </a:xfrm>
           <a:prstGeom prst="rect">
             <a:avLst/>
@@ -8851,12 +8979,12 @@
           <a:noFill/>
         </p:spPr>
         <p:txBody>
-          <a:bodyPr wrap="square" anchor="ctr" lIns="0" rIns="0" tIns="0" bIns="0">
+          <a:bodyPr wrap="square" anchor="t" lIns="0" rIns="0" tIns="0" bIns="0">
             <a:spAutoFit/>
           </a:bodyPr>
           <a:lstStyle/>
           <a:p>
-            <a:pPr algn="l">
+            <a:pPr algn="ctr">
               <a:lnSpc>
                 <a:spcPct val="125000"/>
               </a:lnSpc>
@@ -8865,18 +8993,158 @@
               </a:spcAft>
             </a:pPr>
             <a:r>
-              <a:rPr sz="900" b="1">
+              <a:rPr sz="1050" b="1">
+                <a:solidFill>
+                  <a:srgbClr val="000000"/>
+                </a:solidFill>
+                <a:latin typeface="微软雅黑"/>
+                <a:ea typeface="微软雅黑"/>
+              </a:rPr>
+              <a:t>① 知识源</a:t>
+            </a:r>
+          </a:p>
+        </p:txBody>
+      </p:sp>
+      <p:sp>
+        <p:nvSpPr>
+          <p:cNvPr id="14" name="TextBox 13"/>
+          <p:cNvSpPr txBox="1"/>
+          <p:nvPr/>
+        </p:nvSpPr>
+        <p:spPr>
+          <a:xfrm>
+            <a:off x="628650" y="2038350"/>
+            <a:ext cx="1885950" cy="781050"/>
+          </a:xfrm>
+          <a:prstGeom prst="rect">
+            <a:avLst/>
+          </a:prstGeom>
+          <a:noFill/>
+        </p:spPr>
+        <p:txBody>
+          <a:bodyPr wrap="square" anchor="t" lIns="0" rIns="0" tIns="0" bIns="0">
+            <a:spAutoFit/>
+          </a:bodyPr>
+          <a:lstStyle/>
+          <a:p>
+            <a:pPr algn="ctr">
+              <a:lnSpc>
+                <a:spcPct val="130000"/>
+              </a:lnSpc>
+              <a:spcAft>
+                <a:spcPts val="200"/>
+              </a:spcAft>
+            </a:pPr>
+            <a:r>
+              <a:rPr sz="800" b="0">
                 <a:solidFill>
                   <a:srgbClr val="333333"/>
                 </a:solidFill>
                 <a:latin typeface="微软雅黑"/>
                 <a:ea typeface="微软雅黑"/>
               </a:rPr>
-              <a:t>产出：可导航的分层 wiki + 瘦身后的宪法层</a:t>
-            </a:r>
-          </a:p>
-        </p:txBody>
-      </p:sp>
+              <a:t>存量：docs / specs / skills</a:t>
+            </a:r>
+          </a:p>
+          <a:p>
+            <a:pPr algn="ctr">
+              <a:lnSpc>
+                <a:spcPct val="130000"/>
+              </a:lnSpc>
+              <a:spcAft>
+                <a:spcPts val="200"/>
+              </a:spcAft>
+            </a:pPr>
+            <a:r>
+              <a:rPr sz="800" b="0">
+                <a:solidFill>
+                  <a:srgbClr val="333333"/>
+                </a:solidFill>
+                <a:latin typeface="微软雅黑"/>
+                <a:ea typeface="微软雅黑"/>
+              </a:rPr>
+              <a:t>评审记录（CCB/NodePC/DRB）</a:t>
+            </a:r>
+          </a:p>
+          <a:p>
+            <a:pPr algn="ctr">
+              <a:lnSpc>
+                <a:spcPct val="130000"/>
+              </a:lnSpc>
+              <a:spcAft>
+                <a:spcPts val="200"/>
+              </a:spcAft>
+            </a:pPr>
+            <a:r>
+              <a:rPr sz="800" b="0">
+                <a:solidFill>
+                  <a:srgbClr val="333333"/>
+                </a:solidFill>
+                <a:latin typeface="微软雅黑"/>
+                <a:ea typeface="微软雅黑"/>
+              </a:rPr>
+              <a:t>新增：新特性设计文档、</a:t>
+            </a:r>
+          </a:p>
+          <a:p>
+            <a:pPr algn="ctr">
+              <a:lnSpc>
+                <a:spcPct val="130000"/>
+              </a:lnSpc>
+              <a:spcAft>
+                <a:spcPts val="200"/>
+              </a:spcAft>
+            </a:pPr>
+            <a:r>
+              <a:rPr sz="800" b="0">
+                <a:solidFill>
+                  <a:srgbClr val="333333"/>
+                </a:solidFill>
+                <a:latin typeface="微软雅黑"/>
+                <a:ea typeface="微软雅黑"/>
+              </a:rPr>
+              <a:t>新模块设计文档 等</a:t>
+            </a:r>
+          </a:p>
+        </p:txBody>
+      </p:sp>
+      <p:cxnSp>
+        <p:nvCxnSpPr>
+          <p:cNvPr id="15" name="Connector 14"/>
+          <p:cNvCxnSpPr/>
+          <p:nvPr/>
+        </p:nvCxnSpPr>
+        <p:spPr>
+          <a:xfrm>
+            <a:off x="2590800" y="2324100"/>
+            <a:ext cx="219075" cy="0"/>
+          </a:xfrm>
+          <a:prstGeom prst="line">
+            <a:avLst/>
+          </a:prstGeom>
+          <a:ln w="22225">
+            <a:solidFill>
+              <a:srgbClr val="C00000"/>
+            </a:solidFill>
+            <a:tailEnd type="triangle" w="med" len="med"/>
+          </a:ln>
+          <a:effectLst/>
+        </p:spPr>
+        <p:style>
+          <a:lnRef idx="2">
+            <a:schemeClr val="accent1"/>
+          </a:lnRef>
+          <a:fillRef idx="0">
+            <a:schemeClr val="accent1"/>
+          </a:fillRef>
+          <a:effectRef idx="1">
+            <a:schemeClr val="accent1"/>
+          </a:effectRef>
+          <a:fontRef idx="minor">
+            <a:schemeClr val="tx1"/>
+          </a:fontRef>
+        </p:style>
+      </p:cxnSp>
       <p:sp>
         <p:nvSpPr>
           <p:cNvPr id="16" name="Rounded Rectangle 15"/>
@@ -8885,8 +9153,1312 @@
         </p:nvSpPr>
         <p:spPr>
           <a:xfrm>
-            <a:off x="4267200" y="1428750"/>
-            <a:ext cx="3657600" cy="2914650"/>
+            <a:off x="2809875" y="1771650"/>
+            <a:ext cx="2038350" cy="1104900"/>
+          </a:xfrm>
+          <a:prstGeom prst="roundRect">
+            <a:avLst>
+              <a:gd name="adj" fmla="val 8000"/>
+            </a:avLst>
+          </a:prstGeom>
+          <a:solidFill>
+            <a:srgbClr val="FFF7F7"/>
+          </a:solidFill>
+          <a:ln w="25400">
+            <a:solidFill>
+              <a:srgbClr val="C00000"/>
+            </a:solidFill>
+          </a:ln>
+          <a:effectLst/>
+        </p:spPr>
+        <p:style>
+          <a:lnRef idx="1">
+            <a:schemeClr val="accent1"/>
+          </a:lnRef>
+          <a:fillRef idx="3">
+            <a:schemeClr val="accent1"/>
+          </a:fillRef>
+          <a:effectRef idx="2">
+            <a:schemeClr val="accent1"/>
+          </a:effectRef>
+          <a:fontRef idx="minor">
+            <a:schemeClr val="lt1"/>
+          </a:fontRef>
+        </p:style>
+        <p:txBody>
+          <a:bodyPr rtlCol="0" anchor="ctr" lIns="0" rIns="0"/>
+          <a:lstStyle/>
+          <a:p>
+            <a:pPr algn="ctr"/>
+          </a:p>
+        </p:txBody>
+      </p:sp>
+      <p:sp>
+        <p:nvSpPr>
+          <p:cNvPr id="17" name="TextBox 16"/>
+          <p:cNvSpPr txBox="1"/>
+          <p:nvPr/>
+        </p:nvSpPr>
+        <p:spPr>
+          <a:xfrm>
+            <a:off x="2809875" y="1828800"/>
+            <a:ext cx="2038350" cy="152400"/>
+          </a:xfrm>
+          <a:prstGeom prst="rect">
+            <a:avLst/>
+          </a:prstGeom>
+          <a:noFill/>
+        </p:spPr>
+        <p:txBody>
+          <a:bodyPr wrap="square" anchor="t" lIns="0" rIns="0" tIns="0" bIns="0">
+            <a:spAutoFit/>
+          </a:bodyPr>
+          <a:lstStyle/>
+          <a:p>
+            <a:pPr algn="ctr">
+              <a:lnSpc>
+                <a:spcPct val="125000"/>
+              </a:lnSpc>
+              <a:spcAft>
+                <a:spcPts val="200"/>
+              </a:spcAft>
+            </a:pPr>
+            <a:r>
+              <a:rPr sz="1050" b="1">
+                <a:solidFill>
+                  <a:srgbClr val="C00000"/>
+                </a:solidFill>
+                <a:latin typeface="微软雅黑"/>
+                <a:ea typeface="微软雅黑"/>
+              </a:rPr>
+              <a:t>② 知识库（建设实体）</a:t>
+            </a:r>
+          </a:p>
+        </p:txBody>
+      </p:sp>
+      <p:sp>
+        <p:nvSpPr>
+          <p:cNvPr id="18" name="TextBox 17"/>
+          <p:cNvSpPr txBox="1"/>
+          <p:nvPr/>
+        </p:nvSpPr>
+        <p:spPr>
+          <a:xfrm>
+            <a:off x="2886075" y="2038350"/>
+            <a:ext cx="1885950" cy="781050"/>
+          </a:xfrm>
+          <a:prstGeom prst="rect">
+            <a:avLst/>
+          </a:prstGeom>
+          <a:noFill/>
+        </p:spPr>
+        <p:txBody>
+          <a:bodyPr wrap="square" anchor="t" lIns="0" rIns="0" tIns="0" bIns="0">
+            <a:spAutoFit/>
+          </a:bodyPr>
+          <a:lstStyle/>
+          <a:p>
+            <a:pPr algn="ctr">
+              <a:lnSpc>
+                <a:spcPct val="130000"/>
+              </a:lnSpc>
+              <a:spcAft>
+                <a:spcPts val="200"/>
+              </a:spcAft>
+            </a:pPr>
+            <a:r>
+              <a:rPr sz="800" b="0">
+                <a:solidFill>
+                  <a:srgbClr val="333333"/>
+                </a:solidFill>
+                <a:latin typeface="微软雅黑"/>
+                <a:ea typeface="微软雅黑"/>
+              </a:rPr>
+              <a:t>五类知识：领域 / 架构 / 决策</a:t>
+            </a:r>
+          </a:p>
+          <a:p>
+            <a:pPr algn="ctr">
+              <a:lnSpc>
+                <a:spcPct val="130000"/>
+              </a:lnSpc>
+              <a:spcAft>
+                <a:spcPts val="200"/>
+              </a:spcAft>
+            </a:pPr>
+            <a:r>
+              <a:rPr sz="800" b="0">
+                <a:solidFill>
+                  <a:srgbClr val="333333"/>
+                </a:solidFill>
+                <a:latin typeface="微软雅黑"/>
+                <a:ea typeface="微软雅黑"/>
+              </a:rPr>
+              <a:t>/ 规范约束 / 代码</a:t>
+            </a:r>
+          </a:p>
+          <a:p>
+            <a:pPr algn="ctr">
+              <a:lnSpc>
+                <a:spcPct val="130000"/>
+              </a:lnSpc>
+              <a:spcAft>
+                <a:spcPts val="200"/>
+              </a:spcAft>
+            </a:pPr>
+            <a:r>
+              <a:rPr sz="800" b="0">
+                <a:solidFill>
+                  <a:srgbClr val="333333"/>
+                </a:solidFill>
+                <a:latin typeface="微软雅黑"/>
+                <a:ea typeface="微软雅黑"/>
+              </a:rPr>
+              <a:t>Markdown wiki + index.md</a:t>
+            </a:r>
+          </a:p>
+          <a:p>
+            <a:pPr algn="ctr">
+              <a:lnSpc>
+                <a:spcPct val="130000"/>
+              </a:lnSpc>
+              <a:spcAft>
+                <a:spcPts val="200"/>
+              </a:spcAft>
+            </a:pPr>
+            <a:r>
+              <a:rPr sz="800" b="0">
+                <a:solidFill>
+                  <a:srgbClr val="333333"/>
+                </a:solidFill>
+                <a:latin typeface="微软雅黑"/>
+                <a:ea typeface="微软雅黑"/>
+              </a:rPr>
+              <a:t>+ clangd/LSP 结构层</a:t>
+            </a:r>
+          </a:p>
+        </p:txBody>
+      </p:sp>
+      <p:cxnSp>
+        <p:nvCxnSpPr>
+          <p:cNvPr id="19" name="Connector 18"/>
+          <p:cNvCxnSpPr/>
+          <p:nvPr/>
+        </p:nvCxnSpPr>
+        <p:spPr>
+          <a:xfrm>
+            <a:off x="4848225" y="2324100"/>
+            <a:ext cx="219075" cy="0"/>
+          </a:xfrm>
+          <a:prstGeom prst="line">
+            <a:avLst/>
+          </a:prstGeom>
+          <a:ln w="22225">
+            <a:solidFill>
+              <a:srgbClr val="C00000"/>
+            </a:solidFill>
+            <a:tailEnd type="triangle" w="med" len="med"/>
+          </a:ln>
+          <a:effectLst/>
+        </p:spPr>
+        <p:style>
+          <a:lnRef idx="2">
+            <a:schemeClr val="accent1"/>
+          </a:lnRef>
+          <a:fillRef idx="0">
+            <a:schemeClr val="accent1"/>
+          </a:fillRef>
+          <a:effectRef idx="1">
+            <a:schemeClr val="accent1"/>
+          </a:effectRef>
+          <a:fontRef idx="minor">
+            <a:schemeClr val="tx1"/>
+          </a:fontRef>
+        </p:style>
+      </p:cxnSp>
+      <p:sp>
+        <p:nvSpPr>
+          <p:cNvPr id="20" name="Rounded Rectangle 19"/>
+          <p:cNvSpPr/>
+          <p:nvPr/>
+        </p:nvSpPr>
+        <p:spPr>
+          <a:xfrm>
+            <a:off x="5067300" y="1771650"/>
+            <a:ext cx="2038350" cy="1104900"/>
+          </a:xfrm>
+          <a:prstGeom prst="roundRect">
+            <a:avLst>
+              <a:gd name="adj" fmla="val 8000"/>
+            </a:avLst>
+          </a:prstGeom>
+          <a:solidFill>
+            <a:srgbClr val="F0F0FF"/>
+          </a:solidFill>
+          <a:ln w="12700">
+            <a:solidFill>
+              <a:srgbClr val="0000FF"/>
+            </a:solidFill>
+          </a:ln>
+          <a:effectLst/>
+        </p:spPr>
+        <p:style>
+          <a:lnRef idx="1">
+            <a:schemeClr val="accent1"/>
+          </a:lnRef>
+          <a:fillRef idx="3">
+            <a:schemeClr val="accent1"/>
+          </a:fillRef>
+          <a:effectRef idx="2">
+            <a:schemeClr val="accent1"/>
+          </a:effectRef>
+          <a:fontRef idx="minor">
+            <a:schemeClr val="lt1"/>
+          </a:fontRef>
+        </p:style>
+        <p:txBody>
+          <a:bodyPr rtlCol="0" anchor="ctr" lIns="0" rIns="0"/>
+          <a:lstStyle/>
+          <a:p>
+            <a:pPr algn="ctr"/>
+          </a:p>
+        </p:txBody>
+      </p:sp>
+      <p:sp>
+        <p:nvSpPr>
+          <p:cNvPr id="21" name="TextBox 20"/>
+          <p:cNvSpPr txBox="1"/>
+          <p:nvPr/>
+        </p:nvSpPr>
+        <p:spPr>
+          <a:xfrm>
+            <a:off x="5067300" y="1828800"/>
+            <a:ext cx="2038350" cy="152400"/>
+          </a:xfrm>
+          <a:prstGeom prst="rect">
+            <a:avLst/>
+          </a:prstGeom>
+          <a:noFill/>
+        </p:spPr>
+        <p:txBody>
+          <a:bodyPr wrap="square" anchor="t" lIns="0" rIns="0" tIns="0" bIns="0">
+            <a:spAutoFit/>
+          </a:bodyPr>
+          <a:lstStyle/>
+          <a:p>
+            <a:pPr algn="ctr">
+              <a:lnSpc>
+                <a:spcPct val="125000"/>
+              </a:lnSpc>
+              <a:spcAft>
+                <a:spcPts val="200"/>
+              </a:spcAft>
+            </a:pPr>
+            <a:r>
+              <a:rPr sz="1050" b="1">
+                <a:solidFill>
+                  <a:srgbClr val="0000FF"/>
+                </a:solidFill>
+                <a:latin typeface="微软雅黑"/>
+                <a:ea typeface="微软雅黑"/>
+              </a:rPr>
+              <a:t>③ 知识测评</a:t>
+            </a:r>
+          </a:p>
+        </p:txBody>
+      </p:sp>
+      <p:sp>
+        <p:nvSpPr>
+          <p:cNvPr id="22" name="TextBox 21"/>
+          <p:cNvSpPr txBox="1"/>
+          <p:nvPr/>
+        </p:nvSpPr>
+        <p:spPr>
+          <a:xfrm>
+            <a:off x="5143500" y="2038350"/>
+            <a:ext cx="1885950" cy="781050"/>
+          </a:xfrm>
+          <a:prstGeom prst="rect">
+            <a:avLst/>
+          </a:prstGeom>
+          <a:noFill/>
+        </p:spPr>
+        <p:txBody>
+          <a:bodyPr wrap="square" anchor="t" lIns="0" rIns="0" tIns="0" bIns="0">
+            <a:spAutoFit/>
+          </a:bodyPr>
+          <a:lstStyle/>
+          <a:p>
+            <a:pPr algn="ctr">
+              <a:lnSpc>
+                <a:spcPct val="130000"/>
+              </a:lnSpc>
+              <a:spcAft>
+                <a:spcPts val="200"/>
+              </a:spcAft>
+            </a:pPr>
+            <a:r>
+              <a:rPr sz="800" b="0">
+                <a:solidFill>
+                  <a:srgbClr val="333333"/>
+                </a:solidFill>
+                <a:latin typeface="微软雅黑"/>
+                <a:ea typeface="微软雅黑"/>
+              </a:rPr>
+              <a:t>题库抽检：覆盖度·正确性</a:t>
+            </a:r>
+          </a:p>
+          <a:p>
+            <a:pPr algn="ctr">
+              <a:lnSpc>
+                <a:spcPct val="130000"/>
+              </a:lnSpc>
+              <a:spcAft>
+                <a:spcPts val="200"/>
+              </a:spcAft>
+            </a:pPr>
+            <a:r>
+              <a:rPr sz="800" b="0">
+                <a:solidFill>
+                  <a:srgbClr val="333333"/>
+                </a:solidFill>
+                <a:latin typeface="微软雅黑"/>
+                <a:ea typeface="微软雅黑"/>
+              </a:rPr>
+              <a:t>·一致性·时效性</a:t>
+            </a:r>
+          </a:p>
+          <a:p>
+            <a:pPr algn="ctr">
+              <a:lnSpc>
+                <a:spcPct val="130000"/>
+              </a:lnSpc>
+              <a:spcAft>
+                <a:spcPts val="200"/>
+              </a:spcAft>
+            </a:pPr>
+            <a:r>
+              <a:rPr sz="800" b="0">
+                <a:solidFill>
+                  <a:srgbClr val="333333"/>
+                </a:solidFill>
+                <a:latin typeface="微软雅黑"/>
+                <a:ea typeface="微软雅黑"/>
+              </a:rPr>
+              <a:t>wiki lint（死链/目录）</a:t>
+            </a:r>
+          </a:p>
+          <a:p>
+            <a:pPr algn="ctr">
+              <a:lnSpc>
+                <a:spcPct val="130000"/>
+              </a:lnSpc>
+              <a:spcAft>
+                <a:spcPts val="200"/>
+              </a:spcAft>
+            </a:pPr>
+            <a:r>
+              <a:rPr sz="800" b="0">
+                <a:solidFill>
+                  <a:srgbClr val="333333"/>
+                </a:solidFill>
+                <a:latin typeface="微软雅黑"/>
+                <a:ea typeface="微软雅黑"/>
+              </a:rPr>
+              <a:t>进 CI 阻断</a:t>
+            </a:r>
+          </a:p>
+        </p:txBody>
+      </p:sp>
+      <p:cxnSp>
+        <p:nvCxnSpPr>
+          <p:cNvPr id="23" name="Connector 22"/>
+          <p:cNvCxnSpPr/>
+          <p:nvPr/>
+        </p:nvCxnSpPr>
+        <p:spPr>
+          <a:xfrm>
+            <a:off x="7105650" y="2324100"/>
+            <a:ext cx="219075" cy="0"/>
+          </a:xfrm>
+          <a:prstGeom prst="line">
+            <a:avLst/>
+          </a:prstGeom>
+          <a:ln w="22225">
+            <a:solidFill>
+              <a:srgbClr val="C00000"/>
+            </a:solidFill>
+            <a:tailEnd type="triangle" w="med" len="med"/>
+          </a:ln>
+          <a:effectLst/>
+        </p:spPr>
+        <p:style>
+          <a:lnRef idx="2">
+            <a:schemeClr val="accent1"/>
+          </a:lnRef>
+          <a:fillRef idx="0">
+            <a:schemeClr val="accent1"/>
+          </a:fillRef>
+          <a:effectRef idx="1">
+            <a:schemeClr val="accent1"/>
+          </a:effectRef>
+          <a:fontRef idx="minor">
+            <a:schemeClr val="tx1"/>
+          </a:fontRef>
+        </p:style>
+      </p:cxnSp>
+      <p:sp>
+        <p:nvSpPr>
+          <p:cNvPr id="24" name="Rounded Rectangle 23"/>
+          <p:cNvSpPr/>
+          <p:nvPr/>
+        </p:nvSpPr>
+        <p:spPr>
+          <a:xfrm>
+            <a:off x="7324725" y="1771650"/>
+            <a:ext cx="2038350" cy="1104900"/>
+          </a:xfrm>
+          <a:prstGeom prst="roundRect">
+            <a:avLst>
+              <a:gd name="adj" fmla="val 8000"/>
+            </a:avLst>
+          </a:prstGeom>
+          <a:solidFill>
+            <a:srgbClr val="FFF7F7"/>
+          </a:solidFill>
+          <a:ln w="12700">
+            <a:solidFill>
+              <a:srgbClr val="C00000"/>
+            </a:solidFill>
+          </a:ln>
+          <a:effectLst/>
+        </p:spPr>
+        <p:style>
+          <a:lnRef idx="1">
+            <a:schemeClr val="accent1"/>
+          </a:lnRef>
+          <a:fillRef idx="3">
+            <a:schemeClr val="accent1"/>
+          </a:fillRef>
+          <a:effectRef idx="2">
+            <a:schemeClr val="accent1"/>
+          </a:effectRef>
+          <a:fontRef idx="minor">
+            <a:schemeClr val="lt1"/>
+          </a:fontRef>
+        </p:style>
+        <p:txBody>
+          <a:bodyPr rtlCol="0" anchor="ctr" lIns="0" rIns="0"/>
+          <a:lstStyle/>
+          <a:p>
+            <a:pPr algn="ctr"/>
+          </a:p>
+        </p:txBody>
+      </p:sp>
+      <p:sp>
+        <p:nvSpPr>
+          <p:cNvPr id="25" name="TextBox 24"/>
+          <p:cNvSpPr txBox="1"/>
+          <p:nvPr/>
+        </p:nvSpPr>
+        <p:spPr>
+          <a:xfrm>
+            <a:off x="7324725" y="1828800"/>
+            <a:ext cx="2038350" cy="152400"/>
+          </a:xfrm>
+          <a:prstGeom prst="rect">
+            <a:avLst/>
+          </a:prstGeom>
+          <a:noFill/>
+        </p:spPr>
+        <p:txBody>
+          <a:bodyPr wrap="square" anchor="t" lIns="0" rIns="0" tIns="0" bIns="0">
+            <a:spAutoFit/>
+          </a:bodyPr>
+          <a:lstStyle/>
+          <a:p>
+            <a:pPr algn="ctr">
+              <a:lnSpc>
+                <a:spcPct val="125000"/>
+              </a:lnSpc>
+              <a:spcAft>
+                <a:spcPts val="200"/>
+              </a:spcAft>
+            </a:pPr>
+            <a:r>
+              <a:rPr sz="1050" b="1">
+                <a:solidFill>
+                  <a:srgbClr val="000000"/>
+                </a:solidFill>
+                <a:latin typeface="微软雅黑"/>
+                <a:ea typeface="微软雅黑"/>
+              </a:rPr>
+              <a:t>④ 知识消费</a:t>
+            </a:r>
+          </a:p>
+        </p:txBody>
+      </p:sp>
+      <p:sp>
+        <p:nvSpPr>
+          <p:cNvPr id="26" name="TextBox 25"/>
+          <p:cNvSpPr txBox="1"/>
+          <p:nvPr/>
+        </p:nvSpPr>
+        <p:spPr>
+          <a:xfrm>
+            <a:off x="7400925" y="2038350"/>
+            <a:ext cx="1885950" cy="781050"/>
+          </a:xfrm>
+          <a:prstGeom prst="rect">
+            <a:avLst/>
+          </a:prstGeom>
+          <a:noFill/>
+        </p:spPr>
+        <p:txBody>
+          <a:bodyPr wrap="square" anchor="t" lIns="0" rIns="0" tIns="0" bIns="0">
+            <a:spAutoFit/>
+          </a:bodyPr>
+          <a:lstStyle/>
+          <a:p>
+            <a:pPr algn="ctr">
+              <a:lnSpc>
+                <a:spcPct val="130000"/>
+              </a:lnSpc>
+              <a:spcAft>
+                <a:spcPts val="200"/>
+              </a:spcAft>
+            </a:pPr>
+            <a:r>
+              <a:rPr sz="800" b="0">
+                <a:solidFill>
+                  <a:srgbClr val="333333"/>
+                </a:solidFill>
+                <a:latin typeface="微软雅黑"/>
+                <a:ea typeface="微软雅黑"/>
+              </a:rPr>
+              <a:t>问答 / 学习 / 编码 / 设计</a:t>
+            </a:r>
+          </a:p>
+          <a:p>
+            <a:pPr algn="ctr">
+              <a:lnSpc>
+                <a:spcPct val="130000"/>
+              </a:lnSpc>
+              <a:spcAft>
+                <a:spcPts val="200"/>
+              </a:spcAft>
+            </a:pPr>
+            <a:r>
+              <a:rPr sz="800" b="0">
+                <a:solidFill>
+                  <a:srgbClr val="333333"/>
+                </a:solidFill>
+                <a:latin typeface="微软雅黑"/>
+                <a:ea typeface="微软雅黑"/>
+              </a:rPr>
+              <a:t>Claude Code · OpenSpec</a:t>
+            </a:r>
+          </a:p>
+          <a:p>
+            <a:pPr algn="ctr">
+              <a:lnSpc>
+                <a:spcPct val="130000"/>
+              </a:lnSpc>
+              <a:spcAft>
+                <a:spcPts val="200"/>
+              </a:spcAft>
+            </a:pPr>
+            <a:r>
+              <a:rPr sz="800" b="0">
+                <a:solidFill>
+                  <a:srgbClr val="333333"/>
+                </a:solidFill>
+                <a:latin typeface="微软雅黑"/>
+                <a:ea typeface="微软雅黑"/>
+              </a:rPr>
+              <a:t>评审辅助 · 新人上手</a:t>
+            </a:r>
+          </a:p>
+        </p:txBody>
+      </p:sp>
+      <p:cxnSp>
+        <p:nvCxnSpPr>
+          <p:cNvPr id="27" name="Connector 26"/>
+          <p:cNvCxnSpPr/>
+          <p:nvPr/>
+        </p:nvCxnSpPr>
+        <p:spPr>
+          <a:xfrm>
+            <a:off x="9363075" y="2324100"/>
+            <a:ext cx="219075" cy="0"/>
+          </a:xfrm>
+          <a:prstGeom prst="line">
+            <a:avLst/>
+          </a:prstGeom>
+          <a:ln w="22225">
+            <a:solidFill>
+              <a:srgbClr val="C00000"/>
+            </a:solidFill>
+            <a:tailEnd type="triangle" w="med" len="med"/>
+          </a:ln>
+          <a:effectLst/>
+        </p:spPr>
+        <p:style>
+          <a:lnRef idx="2">
+            <a:schemeClr val="accent1"/>
+          </a:lnRef>
+          <a:fillRef idx="0">
+            <a:schemeClr val="accent1"/>
+          </a:fillRef>
+          <a:effectRef idx="1">
+            <a:schemeClr val="accent1"/>
+          </a:effectRef>
+          <a:fontRef idx="minor">
+            <a:schemeClr val="tx1"/>
+          </a:fontRef>
+        </p:style>
+      </p:cxnSp>
+      <p:sp>
+        <p:nvSpPr>
+          <p:cNvPr id="28" name="Rounded Rectangle 27"/>
+          <p:cNvSpPr/>
+          <p:nvPr/>
+        </p:nvSpPr>
+        <p:spPr>
+          <a:xfrm>
+            <a:off x="9582150" y="1771650"/>
+            <a:ext cx="2038350" cy="1104900"/>
+          </a:xfrm>
+          <a:prstGeom prst="roundRect">
+            <a:avLst>
+              <a:gd name="adj" fmla="val 8000"/>
+            </a:avLst>
+          </a:prstGeom>
+          <a:solidFill>
+            <a:srgbClr val="F0F0FF"/>
+          </a:solidFill>
+          <a:ln w="12700">
+            <a:solidFill>
+              <a:srgbClr val="0000FF"/>
+            </a:solidFill>
+          </a:ln>
+          <a:effectLst/>
+        </p:spPr>
+        <p:style>
+          <a:lnRef idx="1">
+            <a:schemeClr val="accent1"/>
+          </a:lnRef>
+          <a:fillRef idx="3">
+            <a:schemeClr val="accent1"/>
+          </a:fillRef>
+          <a:effectRef idx="2">
+            <a:schemeClr val="accent1"/>
+          </a:effectRef>
+          <a:fontRef idx="minor">
+            <a:schemeClr val="lt1"/>
+          </a:fontRef>
+        </p:style>
+        <p:txBody>
+          <a:bodyPr rtlCol="0" anchor="ctr" lIns="0" rIns="0"/>
+          <a:lstStyle/>
+          <a:p>
+            <a:pPr algn="ctr"/>
+          </a:p>
+        </p:txBody>
+      </p:sp>
+      <p:sp>
+        <p:nvSpPr>
+          <p:cNvPr id="29" name="TextBox 28"/>
+          <p:cNvSpPr txBox="1"/>
+          <p:nvPr/>
+        </p:nvSpPr>
+        <p:spPr>
+          <a:xfrm>
+            <a:off x="9582150" y="1828800"/>
+            <a:ext cx="2038350" cy="152400"/>
+          </a:xfrm>
+          <a:prstGeom prst="rect">
+            <a:avLst/>
+          </a:prstGeom>
+          <a:noFill/>
+        </p:spPr>
+        <p:txBody>
+          <a:bodyPr wrap="square" anchor="t" lIns="0" rIns="0" tIns="0" bIns="0">
+            <a:spAutoFit/>
+          </a:bodyPr>
+          <a:lstStyle/>
+          <a:p>
+            <a:pPr algn="ctr">
+              <a:lnSpc>
+                <a:spcPct val="125000"/>
+              </a:lnSpc>
+              <a:spcAft>
+                <a:spcPts val="200"/>
+              </a:spcAft>
+            </a:pPr>
+            <a:r>
+              <a:rPr sz="1050" b="1">
+                <a:solidFill>
+                  <a:srgbClr val="0000FF"/>
+                </a:solidFill>
+                <a:latin typeface="微软雅黑"/>
+                <a:ea typeface="微软雅黑"/>
+              </a:rPr>
+              <a:t>⑤ 知识调试</a:t>
+            </a:r>
+          </a:p>
+        </p:txBody>
+      </p:sp>
+      <p:sp>
+        <p:nvSpPr>
+          <p:cNvPr id="30" name="TextBox 29"/>
+          <p:cNvSpPr txBox="1"/>
+          <p:nvPr/>
+        </p:nvSpPr>
+        <p:spPr>
+          <a:xfrm>
+            <a:off x="9658350" y="2038350"/>
+            <a:ext cx="1885950" cy="781050"/>
+          </a:xfrm>
+          <a:prstGeom prst="rect">
+            <a:avLst/>
+          </a:prstGeom>
+          <a:noFill/>
+        </p:spPr>
+        <p:txBody>
+          <a:bodyPr wrap="square" anchor="t" lIns="0" rIns="0" tIns="0" bIns="0">
+            <a:spAutoFit/>
+          </a:bodyPr>
+          <a:lstStyle/>
+          <a:p>
+            <a:pPr algn="ctr">
+              <a:lnSpc>
+                <a:spcPct val="130000"/>
+              </a:lnSpc>
+              <a:spcAft>
+                <a:spcPts val="200"/>
+              </a:spcAft>
+            </a:pPr>
+            <a:r>
+              <a:rPr sz="800" b="0">
+                <a:solidFill>
+                  <a:srgbClr val="333333"/>
+                </a:solidFill>
+                <a:latin typeface="微软雅黑"/>
+                <a:ea typeface="微软雅黑"/>
+              </a:rPr>
+              <a:t>在编码 Agent 中统计</a:t>
+            </a:r>
+          </a:p>
+          <a:p>
+            <a:pPr algn="ctr">
+              <a:lnSpc>
+                <a:spcPct val="130000"/>
+              </a:lnSpc>
+              <a:spcAft>
+                <a:spcPts val="200"/>
+              </a:spcAft>
+            </a:pPr>
+            <a:r>
+              <a:rPr sz="800" b="0">
+                <a:solidFill>
+                  <a:srgbClr val="333333"/>
+                </a:solidFill>
+                <a:latin typeface="微软雅黑"/>
+                <a:ea typeface="微软雅黑"/>
+              </a:rPr>
+              <a:t>wiki 被调用情况：</a:t>
+            </a:r>
+          </a:p>
+          <a:p>
+            <a:pPr algn="ctr">
+              <a:lnSpc>
+                <a:spcPct val="130000"/>
+              </a:lnSpc>
+              <a:spcAft>
+                <a:spcPts val="200"/>
+              </a:spcAft>
+            </a:pPr>
+            <a:r>
+              <a:rPr sz="800" b="0">
+                <a:solidFill>
+                  <a:srgbClr val="333333"/>
+                </a:solidFill>
+                <a:latin typeface="微软雅黑"/>
+                <a:ea typeface="微软雅黑"/>
+              </a:rPr>
+              <a:t>热点知识 / 缺失知识 /</a:t>
+            </a:r>
+          </a:p>
+          <a:p>
+            <a:pPr algn="ctr">
+              <a:lnSpc>
+                <a:spcPct val="130000"/>
+              </a:lnSpc>
+              <a:spcAft>
+                <a:spcPts val="200"/>
+              </a:spcAft>
+            </a:pPr>
+            <a:r>
+              <a:rPr sz="800" b="0">
+                <a:solidFill>
+                  <a:srgbClr val="333333"/>
+                </a:solidFill>
+                <a:latin typeface="微软雅黑"/>
+                <a:ea typeface="微软雅黑"/>
+              </a:rPr>
+              <a:t>零调用知识</a:t>
+            </a:r>
+          </a:p>
+        </p:txBody>
+      </p:sp>
+      <p:cxnSp>
+        <p:nvCxnSpPr>
+          <p:cNvPr id="31" name="Connector 30"/>
+          <p:cNvCxnSpPr/>
+          <p:nvPr/>
+        </p:nvCxnSpPr>
+        <p:spPr>
+          <a:xfrm>
+            <a:off x="1571625" y="2876550"/>
+            <a:ext cx="0" cy="323850"/>
+          </a:xfrm>
+          <a:prstGeom prst="line">
+            <a:avLst/>
+          </a:prstGeom>
+          <a:ln w="13970">
+            <a:solidFill>
+              <a:srgbClr val="C00000"/>
+            </a:solidFill>
+            <a:prstDash val="dash"/>
+          </a:ln>
+          <a:effectLst/>
+        </p:spPr>
+        <p:style>
+          <a:lnRef idx="2">
+            <a:schemeClr val="accent1"/>
+          </a:lnRef>
+          <a:fillRef idx="0">
+            <a:schemeClr val="accent1"/>
+          </a:fillRef>
+          <a:effectRef idx="1">
+            <a:schemeClr val="accent1"/>
+          </a:effectRef>
+          <a:fontRef idx="minor">
+            <a:schemeClr val="tx1"/>
+          </a:fontRef>
+        </p:style>
+      </p:cxnSp>
+      <p:sp>
+        <p:nvSpPr>
+          <p:cNvPr id="32" name="TextBox 31"/>
+          <p:cNvSpPr txBox="1"/>
+          <p:nvPr/>
+        </p:nvSpPr>
+        <p:spPr>
+          <a:xfrm>
+            <a:off x="1619250" y="2952750"/>
+            <a:ext cx="1143000" cy="133350"/>
+          </a:xfrm>
+          <a:prstGeom prst="rect">
+            <a:avLst/>
+          </a:prstGeom>
+          <a:noFill/>
+        </p:spPr>
+        <p:txBody>
+          <a:bodyPr wrap="square" anchor="t" lIns="0" rIns="0" tIns="0" bIns="0">
+            <a:spAutoFit/>
+          </a:bodyPr>
+          <a:lstStyle/>
+          <a:p>
+            <a:pPr algn="l">
+              <a:lnSpc>
+                <a:spcPct val="125000"/>
+              </a:lnSpc>
+              <a:spcAft>
+                <a:spcPts val="200"/>
+              </a:spcAft>
+            </a:pPr>
+            <a:r>
+              <a:rPr sz="750" b="0">
+                <a:solidFill>
+                  <a:srgbClr val="C00000"/>
+                </a:solidFill>
+                <a:latin typeface="微软雅黑"/>
+                <a:ea typeface="微软雅黑"/>
+              </a:rPr>
+              <a:t>新源入库</a:t>
+            </a:r>
+          </a:p>
+        </p:txBody>
+      </p:sp>
+      <p:cxnSp>
+        <p:nvCxnSpPr>
+          <p:cNvPr id="33" name="Connector 32"/>
+          <p:cNvCxnSpPr/>
+          <p:nvPr/>
+        </p:nvCxnSpPr>
+        <p:spPr>
+          <a:xfrm>
+            <a:off x="6086475" y="2876550"/>
+            <a:ext cx="0" cy="323850"/>
+          </a:xfrm>
+          <a:prstGeom prst="line">
+            <a:avLst/>
+          </a:prstGeom>
+          <a:ln w="13970">
+            <a:solidFill>
+              <a:srgbClr val="C00000"/>
+            </a:solidFill>
+            <a:prstDash val="dash"/>
+          </a:ln>
+          <a:effectLst/>
+        </p:spPr>
+        <p:style>
+          <a:lnRef idx="2">
+            <a:schemeClr val="accent1"/>
+          </a:lnRef>
+          <a:fillRef idx="0">
+            <a:schemeClr val="accent1"/>
+          </a:fillRef>
+          <a:effectRef idx="1">
+            <a:schemeClr val="accent1"/>
+          </a:effectRef>
+          <a:fontRef idx="minor">
+            <a:schemeClr val="tx1"/>
+          </a:fontRef>
+        </p:style>
+      </p:cxnSp>
+      <p:sp>
+        <p:nvSpPr>
+          <p:cNvPr id="34" name="TextBox 33"/>
+          <p:cNvSpPr txBox="1"/>
+          <p:nvPr/>
+        </p:nvSpPr>
+        <p:spPr>
+          <a:xfrm>
+            <a:off x="6134100" y="2952750"/>
+            <a:ext cx="1143000" cy="133350"/>
+          </a:xfrm>
+          <a:prstGeom prst="rect">
+            <a:avLst/>
+          </a:prstGeom>
+          <a:noFill/>
+        </p:spPr>
+        <p:txBody>
+          <a:bodyPr wrap="square" anchor="t" lIns="0" rIns="0" tIns="0" bIns="0">
+            <a:spAutoFit/>
+          </a:bodyPr>
+          <a:lstStyle/>
+          <a:p>
+            <a:pPr algn="l">
+              <a:lnSpc>
+                <a:spcPct val="125000"/>
+              </a:lnSpc>
+              <a:spcAft>
+                <a:spcPts val="200"/>
+              </a:spcAft>
+            </a:pPr>
+            <a:r>
+              <a:rPr sz="750" b="0">
+                <a:solidFill>
+                  <a:srgbClr val="C00000"/>
+                </a:solidFill>
+                <a:latin typeface="微软雅黑"/>
+                <a:ea typeface="微软雅黑"/>
+              </a:rPr>
+              <a:t>发现问题/不完善</a:t>
+            </a:r>
+          </a:p>
+        </p:txBody>
+      </p:sp>
+      <p:cxnSp>
+        <p:nvCxnSpPr>
+          <p:cNvPr id="35" name="Connector 34"/>
+          <p:cNvCxnSpPr/>
+          <p:nvPr/>
+        </p:nvCxnSpPr>
+        <p:spPr>
+          <a:xfrm>
+            <a:off x="8343900" y="2876550"/>
+            <a:ext cx="0" cy="323850"/>
+          </a:xfrm>
+          <a:prstGeom prst="line">
+            <a:avLst/>
+          </a:prstGeom>
+          <a:ln w="13970">
+            <a:solidFill>
+              <a:srgbClr val="C00000"/>
+            </a:solidFill>
+            <a:prstDash val="dash"/>
+          </a:ln>
+          <a:effectLst/>
+        </p:spPr>
+        <p:style>
+          <a:lnRef idx="2">
+            <a:schemeClr val="accent1"/>
+          </a:lnRef>
+          <a:fillRef idx="0">
+            <a:schemeClr val="accent1"/>
+          </a:fillRef>
+          <a:effectRef idx="1">
+            <a:schemeClr val="accent1"/>
+          </a:effectRef>
+          <a:fontRef idx="minor">
+            <a:schemeClr val="tx1"/>
+          </a:fontRef>
+        </p:style>
+      </p:cxnSp>
+      <p:sp>
+        <p:nvSpPr>
+          <p:cNvPr id="36" name="TextBox 35"/>
+          <p:cNvSpPr txBox="1"/>
+          <p:nvPr/>
+        </p:nvSpPr>
+        <p:spPr>
+          <a:xfrm>
+            <a:off x="8391525" y="2952750"/>
+            <a:ext cx="1143000" cy="133350"/>
+          </a:xfrm>
+          <a:prstGeom prst="rect">
+            <a:avLst/>
+          </a:prstGeom>
+          <a:noFill/>
+        </p:spPr>
+        <p:txBody>
+          <a:bodyPr wrap="square" anchor="t" lIns="0" rIns="0" tIns="0" bIns="0">
+            <a:spAutoFit/>
+          </a:bodyPr>
+          <a:lstStyle/>
+          <a:p>
+            <a:pPr algn="l">
+              <a:lnSpc>
+                <a:spcPct val="125000"/>
+              </a:lnSpc>
+              <a:spcAft>
+                <a:spcPts val="200"/>
+              </a:spcAft>
+            </a:pPr>
+            <a:r>
+              <a:rPr sz="750" b="0">
+                <a:solidFill>
+                  <a:srgbClr val="C00000"/>
+                </a:solidFill>
+                <a:latin typeface="微软雅黑"/>
+                <a:ea typeface="微软雅黑"/>
+              </a:rPr>
+              <a:t>消费端反馈</a:t>
+            </a:r>
+          </a:p>
+        </p:txBody>
+      </p:sp>
+      <p:cxnSp>
+        <p:nvCxnSpPr>
+          <p:cNvPr id="37" name="Connector 36"/>
+          <p:cNvCxnSpPr/>
+          <p:nvPr/>
+        </p:nvCxnSpPr>
+        <p:spPr>
+          <a:xfrm>
+            <a:off x="10601325" y="2876550"/>
+            <a:ext cx="0" cy="323850"/>
+          </a:xfrm>
+          <a:prstGeom prst="line">
+            <a:avLst/>
+          </a:prstGeom>
+          <a:ln w="13970">
+            <a:solidFill>
+              <a:srgbClr val="C00000"/>
+            </a:solidFill>
+            <a:prstDash val="dash"/>
+          </a:ln>
+          <a:effectLst/>
+        </p:spPr>
+        <p:style>
+          <a:lnRef idx="2">
+            <a:schemeClr val="accent1"/>
+          </a:lnRef>
+          <a:fillRef idx="0">
+            <a:schemeClr val="accent1"/>
+          </a:fillRef>
+          <a:effectRef idx="1">
+            <a:schemeClr val="accent1"/>
+          </a:effectRef>
+          <a:fontRef idx="minor">
+            <a:schemeClr val="tx1"/>
+          </a:fontRef>
+        </p:style>
+      </p:cxnSp>
+      <p:sp>
+        <p:nvSpPr>
+          <p:cNvPr id="38" name="TextBox 37"/>
+          <p:cNvSpPr txBox="1"/>
+          <p:nvPr/>
+        </p:nvSpPr>
+        <p:spPr>
+          <a:xfrm>
+            <a:off x="10648950" y="2952750"/>
+            <a:ext cx="1143000" cy="133350"/>
+          </a:xfrm>
+          <a:prstGeom prst="rect">
+            <a:avLst/>
+          </a:prstGeom>
+          <a:noFill/>
+        </p:spPr>
+        <p:txBody>
+          <a:bodyPr wrap="square" anchor="t" lIns="0" rIns="0" tIns="0" bIns="0">
+            <a:spAutoFit/>
+          </a:bodyPr>
+          <a:lstStyle/>
+          <a:p>
+            <a:pPr algn="l">
+              <a:lnSpc>
+                <a:spcPct val="125000"/>
+              </a:lnSpc>
+              <a:spcAft>
+                <a:spcPts val="200"/>
+              </a:spcAft>
+            </a:pPr>
+            <a:r>
+              <a:rPr sz="750" b="0">
+                <a:solidFill>
+                  <a:srgbClr val="C00000"/>
+                </a:solidFill>
+                <a:latin typeface="微软雅黑"/>
+                <a:ea typeface="微软雅黑"/>
+              </a:rPr>
+              <a:t>热点/缺失追踪</a:t>
+            </a:r>
+          </a:p>
+        </p:txBody>
+      </p:sp>
+      <p:cxnSp>
+        <p:nvCxnSpPr>
+          <p:cNvPr id="39" name="Connector 38"/>
+          <p:cNvCxnSpPr/>
+          <p:nvPr/>
+        </p:nvCxnSpPr>
+        <p:spPr>
+          <a:xfrm>
+            <a:off x="1571625" y="3200400"/>
+            <a:ext cx="9029700" cy="0"/>
+          </a:xfrm>
+          <a:prstGeom prst="line">
+            <a:avLst/>
+          </a:prstGeom>
+          <a:ln w="19050">
+            <a:solidFill>
+              <a:srgbClr val="C00000"/>
+            </a:solidFill>
+            <a:prstDash val="dash"/>
+          </a:ln>
+          <a:effectLst/>
+        </p:spPr>
+        <p:style>
+          <a:lnRef idx="2">
+            <a:schemeClr val="accent1"/>
+          </a:lnRef>
+          <a:fillRef idx="0">
+            <a:schemeClr val="accent1"/>
+          </a:fillRef>
+          <a:effectRef idx="1">
+            <a:schemeClr val="accent1"/>
+          </a:effectRef>
+          <a:fontRef idx="minor">
+            <a:schemeClr val="tx1"/>
+          </a:fontRef>
+        </p:style>
+      </p:cxnSp>
+      <p:cxnSp>
+        <p:nvCxnSpPr>
+          <p:cNvPr id="40" name="Connector 39"/>
+          <p:cNvCxnSpPr/>
+          <p:nvPr/>
+        </p:nvCxnSpPr>
+        <p:spPr>
+          <a:xfrm flipV="1">
+            <a:off x="3829050" y="2895600"/>
+            <a:ext cx="0" cy="304800"/>
+          </a:xfrm>
+          <a:prstGeom prst="line">
+            <a:avLst/>
+          </a:prstGeom>
+          <a:ln w="25400">
+            <a:solidFill>
+              <a:srgbClr val="C00000"/>
+            </a:solidFill>
+            <a:tailEnd type="triangle" w="med" len="med"/>
+          </a:ln>
+          <a:effectLst/>
+        </p:spPr>
+        <p:style>
+          <a:lnRef idx="2">
+            <a:schemeClr val="accent1"/>
+          </a:lnRef>
+          <a:fillRef idx="0">
+            <a:schemeClr val="accent1"/>
+          </a:fillRef>
+          <a:effectRef idx="1">
+            <a:schemeClr val="accent1"/>
+          </a:effectRef>
+          <a:fontRef idx="minor">
+            <a:schemeClr val="tx1"/>
+          </a:fontRef>
+        </p:style>
+      </p:cxnSp>
+      <p:sp>
+        <p:nvSpPr>
+          <p:cNvPr id="41" name="TextBox 40"/>
+          <p:cNvSpPr txBox="1"/>
+          <p:nvPr/>
+        </p:nvSpPr>
+        <p:spPr>
+          <a:xfrm>
+            <a:off x="2971800" y="3276600"/>
+            <a:ext cx="2857500" cy="152400"/>
+          </a:xfrm>
+          <a:prstGeom prst="rect">
+            <a:avLst/>
+          </a:prstGeom>
+          <a:noFill/>
+        </p:spPr>
+        <p:txBody>
+          <a:bodyPr wrap="square" anchor="t" lIns="0" rIns="0" tIns="0" bIns="0">
+            <a:spAutoFit/>
+          </a:bodyPr>
+          <a:lstStyle/>
+          <a:p>
+            <a:pPr algn="l">
+              <a:lnSpc>
+                <a:spcPct val="125000"/>
+              </a:lnSpc>
+              <a:spcAft>
+                <a:spcPts val="200"/>
+              </a:spcAft>
+            </a:pPr>
+            <a:r>
+              <a:rPr sz="950" b="1">
+                <a:solidFill>
+                  <a:srgbClr val="C00000"/>
+                </a:solidFill>
+                <a:latin typeface="微软雅黑"/>
+                <a:ea typeface="微软雅黑"/>
+              </a:rPr>
+              <a:t>触发知识库刷新（四类触发器）</a:t>
+            </a:r>
+          </a:p>
+        </p:txBody>
+      </p:sp>
+      <p:sp>
+        <p:nvSpPr>
+          <p:cNvPr id="42" name="Rounded Rectangle 41"/>
+          <p:cNvSpPr/>
+          <p:nvPr/>
+        </p:nvSpPr>
+        <p:spPr>
+          <a:xfrm>
+            <a:off x="419100" y="3905250"/>
+            <a:ext cx="2724150" cy="1504950"/>
           </a:xfrm>
           <a:prstGeom prst="roundRect">
             <a:avLst>
@@ -8927,14 +10499,14 @@
       </p:sp>
       <p:sp>
         <p:nvSpPr>
-          <p:cNvPr id="17" name="Rectangle 16"/>
+          <p:cNvPr id="43" name="Rectangle 42"/>
           <p:cNvSpPr/>
           <p:nvPr/>
         </p:nvSpPr>
         <p:spPr>
           <a:xfrm>
-            <a:off x="4305300" y="1428750"/>
-            <a:ext cx="3581400" cy="38100"/>
+            <a:off x="457200" y="3905250"/>
+            <a:ext cx="2647950" cy="38100"/>
           </a:xfrm>
           <a:prstGeom prst="rect">
             <a:avLst/>
@@ -8971,14 +10543,14 @@
       </p:sp>
       <p:sp>
         <p:nvSpPr>
-          <p:cNvPr id="18" name="TextBox 17"/>
+          <p:cNvPr id="44" name="TextBox 43"/>
           <p:cNvSpPr txBox="1"/>
           <p:nvPr/>
         </p:nvSpPr>
         <p:spPr>
           <a:xfrm>
-            <a:off x="4419600" y="1562100"/>
-            <a:ext cx="3352800" cy="190500"/>
+            <a:off x="552450" y="4019550"/>
+            <a:ext cx="1905000" cy="171450"/>
           </a:xfrm>
           <a:prstGeom prst="rect">
             <a:avLst/>
@@ -8986,7 +10558,7 @@
           <a:noFill/>
         </p:spPr>
         <p:txBody>
-          <a:bodyPr wrap="square" anchor="t" lIns="0" rIns="0" tIns="0" bIns="0">
+          <a:bodyPr wrap="none" anchor="t" lIns="0" rIns="0" tIns="0" bIns="0">
             <a:spAutoFit/>
           </a:bodyPr>
           <a:lstStyle/>
@@ -9000,303 +10572,41 @@
               </a:spcAft>
             </a:pPr>
             <a:r>
-              <a:rPr sz="1250" b="1">
+              <a:rPr sz="1050" b="1">
                 <a:solidFill>
                   <a:srgbClr val="000000"/>
                 </a:solidFill>
                 <a:latin typeface="微软雅黑"/>
                 <a:ea typeface="微软雅黑"/>
               </a:rPr>
-              <a:t>工作包② C/C++ 结构层</a:t>
-            </a:r>
-          </a:p>
-        </p:txBody>
-      </p:sp>
-      <p:sp>
-        <p:nvSpPr>
-          <p:cNvPr id="19" name="TextBox 18"/>
-          <p:cNvSpPr txBox="1"/>
-          <p:nvPr/>
-        </p:nvSpPr>
-        <p:spPr>
-          <a:xfrm>
-            <a:off x="4419600" y="1790700"/>
-            <a:ext cx="3352800" cy="152400"/>
-          </a:xfrm>
-          <a:prstGeom prst="rect">
-            <a:avLst/>
-          </a:prstGeom>
-          <a:noFill/>
-        </p:spPr>
-        <p:txBody>
-          <a:bodyPr wrap="square" anchor="t" lIns="0" rIns="0" tIns="0" bIns="0">
-            <a:spAutoFit/>
-          </a:bodyPr>
-          <a:lstStyle/>
-          <a:p>
-            <a:pPr algn="l">
-              <a:lnSpc>
-                <a:spcPct val="125000"/>
-              </a:lnSpc>
-              <a:spcAft>
-                <a:spcPts val="200"/>
-              </a:spcAft>
-            </a:pPr>
-            <a:r>
-              <a:rPr sz="950" b="1">
-                <a:solidFill>
-                  <a:srgbClr val="0000FF"/>
-                </a:solidFill>
-                <a:latin typeface="微软雅黑"/>
-                <a:ea typeface="微软雅黑"/>
-              </a:rPr>
-              <a:t>工程量小 · 大仓价值最高</a:t>
-            </a:r>
-          </a:p>
-        </p:txBody>
-      </p:sp>
-      <p:sp>
-        <p:nvSpPr>
-          <p:cNvPr id="20" name="TextBox 19"/>
-          <p:cNvSpPr txBox="1"/>
-          <p:nvPr/>
-        </p:nvSpPr>
-        <p:spPr>
-          <a:xfrm>
-            <a:off x="4419600" y="2000250"/>
-            <a:ext cx="3352800" cy="1809750"/>
-          </a:xfrm>
-          <a:prstGeom prst="rect">
-            <a:avLst/>
-          </a:prstGeom>
-          <a:noFill/>
-        </p:spPr>
-        <p:txBody>
-          <a:bodyPr wrap="square" anchor="t" lIns="0" rIns="0" tIns="0" bIns="0">
-            <a:spAutoFit/>
-          </a:bodyPr>
-          <a:lstStyle/>
-          <a:p>
-            <a:pPr algn="l">
-              <a:lnSpc>
-                <a:spcPct val="130000"/>
-              </a:lnSpc>
-              <a:spcAft>
-                <a:spcPts val="300"/>
-              </a:spcAft>
-            </a:pPr>
-            <a:r>
-              <a:rPr sz="600" b="0">
-                <a:solidFill>
-                  <a:srgbClr val="C00000"/>
-                </a:solidFill>
-                <a:latin typeface="微软雅黑"/>
-                <a:ea typeface="微软雅黑"/>
-              </a:rPr>
-              <a:t>● </a:t>
-            </a:r>
-            <a:r>
-              <a:rPr sz="950" b="0">
-                <a:solidFill>
-                  <a:srgbClr val="000000"/>
-                </a:solidFill>
-                <a:latin typeface="微软雅黑"/>
-                <a:ea typeface="微软雅黑"/>
-              </a:rPr>
-              <a:t>生成 </a:t>
-            </a:r>
-            <a:r>
-              <a:rPr sz="950" b="1">
-                <a:solidFill>
-                  <a:srgbClr val="0000FF"/>
-                </a:solidFill>
-                <a:latin typeface="微软雅黑"/>
-                <a:ea typeface="微软雅黑"/>
-              </a:rPr>
-              <a:t>compile_commands.json</a:t>
-            </a:r>
-            <a:r>
-              <a:rPr sz="950" b="0">
-                <a:solidFill>
-                  <a:srgbClr val="000000"/>
-                </a:solidFill>
-                <a:latin typeface="微软雅黑"/>
-                <a:ea typeface="微软雅黑"/>
-              </a:rPr>
-              <a:t>（CMake 一个开关；其他构建系统用 bear / compiledb）</a:t>
-            </a:r>
-          </a:p>
-          <a:p>
-            <a:pPr algn="l">
-              <a:lnSpc>
-                <a:spcPct val="130000"/>
-              </a:lnSpc>
-              <a:spcAft>
-                <a:spcPts val="300"/>
-              </a:spcAft>
-            </a:pPr>
-            <a:r>
-              <a:rPr sz="600" b="0">
-                <a:solidFill>
-                  <a:srgbClr val="C00000"/>
-                </a:solidFill>
-                <a:latin typeface="微软雅黑"/>
-                <a:ea typeface="微软雅黑"/>
-              </a:rPr>
-              <a:t>● </a:t>
-            </a:r>
-            <a:r>
-              <a:rPr sz="950" b="0">
-                <a:solidFill>
-                  <a:srgbClr val="000000"/>
-                </a:solidFill>
-                <a:latin typeface="微软雅黑"/>
-                <a:ea typeface="微软雅黑"/>
-              </a:rPr>
-              <a:t>部署 </a:t>
-            </a:r>
-            <a:r>
-              <a:rPr sz="950" b="1">
-                <a:solidFill>
-                  <a:srgbClr val="000000"/>
-                </a:solidFill>
-                <a:latin typeface="微软雅黑"/>
-                <a:ea typeface="微软雅黑"/>
-              </a:rPr>
-              <a:t>clangd MCP Server</a:t>
-            </a:r>
-            <a:r>
-              <a:rPr sz="950" b="0">
-                <a:solidFill>
-                  <a:srgbClr val="000000"/>
-                </a:solidFill>
-                <a:latin typeface="微软雅黑"/>
-                <a:ea typeface="微软雅黑"/>
-              </a:rPr>
-              <a:t>（Chromium 级大仓开箱即用；超大仓可选 remote-index）</a:t>
-            </a:r>
-          </a:p>
-          <a:p>
-            <a:pPr algn="l">
-              <a:lnSpc>
-                <a:spcPct val="130000"/>
-              </a:lnSpc>
-              <a:spcAft>
-                <a:spcPts val="300"/>
-              </a:spcAft>
-            </a:pPr>
-            <a:r>
-              <a:rPr sz="600" b="0">
-                <a:solidFill>
-                  <a:srgbClr val="C00000"/>
-                </a:solidFill>
-                <a:latin typeface="微软雅黑"/>
-                <a:ea typeface="微软雅黑"/>
-              </a:rPr>
-              <a:t>● </a:t>
-            </a:r>
-            <a:r>
-              <a:rPr sz="950" b="0">
-                <a:solidFill>
-                  <a:srgbClr val="000000"/>
-                </a:solidFill>
-                <a:latin typeface="微软雅黑"/>
-                <a:ea typeface="微软雅黑"/>
-              </a:rPr>
-              <a:t>CLAUDE.md 加</a:t>
-            </a:r>
-            <a:r>
-              <a:rPr sz="950" b="1">
-                <a:solidFill>
-                  <a:srgbClr val="000000"/>
-                </a:solidFill>
-                <a:latin typeface="微软雅黑"/>
-                <a:ea typeface="微软雅黑"/>
-              </a:rPr>
-              <a:t>路由规则</a:t>
-            </a:r>
-            <a:r>
-              <a:rPr sz="950" b="0">
-                <a:solidFill>
-                  <a:srgbClr val="000000"/>
-                </a:solidFill>
-                <a:latin typeface="微软雅黑"/>
-                <a:ea typeface="微软雅黑"/>
-              </a:rPr>
-              <a:t>：</a:t>
-            </a:r>
-            <a:r>
-              <a:rPr sz="950" b="1">
-                <a:solidFill>
-                  <a:srgbClr val="0000FF"/>
-                </a:solidFill>
-                <a:latin typeface="微软雅黑"/>
-                <a:ea typeface="微软雅黑"/>
-              </a:rPr>
-              <a:t>"符号查找用 LSP 工具；字符串/注释/日志检索才用 grep"</a:t>
-            </a:r>
-            <a:r>
-              <a:rPr sz="950" b="0">
-                <a:solidFill>
-                  <a:srgbClr val="000000"/>
-                </a:solidFill>
-                <a:latin typeface="微软雅黑"/>
-                <a:ea typeface="微软雅黑"/>
-              </a:rPr>
-              <a:t>（最易遗漏）</a:t>
-            </a:r>
-          </a:p>
-          <a:p>
-            <a:pPr algn="l">
-              <a:lnSpc>
-                <a:spcPct val="130000"/>
-              </a:lnSpc>
-              <a:spcAft>
-                <a:spcPts val="300"/>
-              </a:spcAft>
-            </a:pPr>
-            <a:r>
-              <a:rPr sz="600" b="0">
-                <a:solidFill>
-                  <a:srgbClr val="C00000"/>
-                </a:solidFill>
-                <a:latin typeface="微软雅黑"/>
-                <a:ea typeface="微软雅黑"/>
-              </a:rPr>
-              <a:t>● </a:t>
-            </a:r>
-            <a:r>
-              <a:rPr sz="950" b="0">
-                <a:solidFill>
-                  <a:srgbClr val="000000"/>
-                </a:solidFill>
-                <a:latin typeface="微软雅黑"/>
-                <a:ea typeface="微软雅黑"/>
-              </a:rPr>
-              <a:t>验证：跨模块引用追踪，对比 grep 与 LSP 的上下文消耗</a:t>
-            </a:r>
-          </a:p>
-        </p:txBody>
-      </p:sp>
-      <p:sp>
-        <p:nvSpPr>
-          <p:cNvPr id="21" name="Rectangle 20"/>
+              <a:t>触发器① 新知识源</a:t>
+            </a:r>
+          </a:p>
+        </p:txBody>
+      </p:sp>
+      <p:sp>
+        <p:nvSpPr>
+          <p:cNvPr id="45" name="Rounded Rectangle 44"/>
           <p:cNvSpPr/>
           <p:nvPr/>
         </p:nvSpPr>
         <p:spPr>
           <a:xfrm>
-            <a:off x="4381500" y="3943350"/>
-            <a:ext cx="3429000" cy="304800"/>
-          </a:xfrm>
-          <a:prstGeom prst="rect">
-            <a:avLst/>
+            <a:off x="2628900" y="4019550"/>
+            <a:ext cx="400050" cy="171450"/>
+          </a:xfrm>
+          <a:prstGeom prst="roundRect">
+            <a:avLst>
+              <a:gd name="adj" fmla="val 30000"/>
+            </a:avLst>
           </a:prstGeom>
           <a:solidFill>
-            <a:srgbClr val="F2F2F2"/>
+            <a:srgbClr val="FFF7F7"/>
           </a:solidFill>
-          <a:ln>
-            <a:noFill/>
+          <a:ln w="9525">
+            <a:solidFill>
+              <a:srgbClr val="C00000"/>
+            </a:solidFill>
           </a:ln>
           <a:effectLst/>
         </p:spPr>
@@ -9315,7 +10625,7 @@
           </a:fontRef>
         </p:style>
         <p:txBody>
-          <a:bodyPr rtlCol="0" anchor="ctr"/>
+          <a:bodyPr rtlCol="0" anchor="ctr" lIns="0" rIns="0"/>
           <a:lstStyle/>
           <a:p>
             <a:pPr algn="ctr"/>
@@ -9324,14 +10634,14 @@
       </p:sp>
       <p:sp>
         <p:nvSpPr>
-          <p:cNvPr id="22" name="TextBox 21"/>
+          <p:cNvPr id="46" name="TextBox 45"/>
           <p:cNvSpPr txBox="1"/>
           <p:nvPr/>
         </p:nvSpPr>
         <p:spPr>
           <a:xfrm>
-            <a:off x="4476750" y="3943350"/>
-            <a:ext cx="3238500" cy="304800"/>
+            <a:off x="2628900" y="4038600"/>
+            <a:ext cx="400050" cy="133350"/>
           </a:xfrm>
           <a:prstGeom prst="rect">
             <a:avLst/>
@@ -9339,42 +10649,165 @@
           <a:noFill/>
         </p:spPr>
         <p:txBody>
-          <a:bodyPr wrap="square" anchor="ctr" lIns="0" rIns="0" tIns="0" bIns="0">
+          <a:bodyPr wrap="square" anchor="t" lIns="0" rIns="0" tIns="0" bIns="0">
             <a:spAutoFit/>
           </a:bodyPr>
           <a:lstStyle/>
           <a:p>
+            <a:pPr algn="ctr">
+              <a:lnSpc>
+                <a:spcPct val="125000"/>
+              </a:lnSpc>
+              <a:spcAft>
+                <a:spcPts val="200"/>
+              </a:spcAft>
+            </a:pPr>
+            <a:r>
+              <a:rPr sz="800" b="1">
+                <a:solidFill>
+                  <a:srgbClr val="C00000"/>
+                </a:solidFill>
+                <a:latin typeface="微软雅黑"/>
+                <a:ea typeface="微软雅黑"/>
+              </a:rPr>
+              <a:t>①→②</a:t>
+            </a:r>
+          </a:p>
+        </p:txBody>
+      </p:sp>
+      <p:sp>
+        <p:nvSpPr>
+          <p:cNvPr id="47" name="TextBox 46"/>
+          <p:cNvSpPr txBox="1"/>
+          <p:nvPr/>
+        </p:nvSpPr>
+        <p:spPr>
+          <a:xfrm>
+            <a:off x="552450" y="4267200"/>
+            <a:ext cx="2476500" cy="1066800"/>
+          </a:xfrm>
+          <a:prstGeom prst="rect">
+            <a:avLst/>
+          </a:prstGeom>
+          <a:noFill/>
+        </p:spPr>
+        <p:txBody>
+          <a:bodyPr wrap="square" anchor="t" lIns="0" rIns="0" tIns="0" bIns="0">
+            <a:spAutoFit/>
+          </a:bodyPr>
+          <a:lstStyle/>
+          <a:p>
             <a:pPr algn="l">
               <a:lnSpc>
-                <a:spcPct val="125000"/>
-              </a:lnSpc>
-              <a:spcAft>
-                <a:spcPts val="200"/>
-              </a:spcAft>
-            </a:pPr>
-            <a:r>
-              <a:rPr sz="900" b="1">
-                <a:solidFill>
-                  <a:srgbClr val="333333"/>
-                </a:solidFill>
-                <a:latin typeface="微软雅黑"/>
-                <a:ea typeface="微软雅黑"/>
-              </a:rPr>
-              <a:t>产出：编译器级符号导航，替代"自建知识图谱"</a:t>
-            </a:r>
-          </a:p>
-        </p:txBody>
-      </p:sp>
-      <p:sp>
-        <p:nvSpPr>
-          <p:cNvPr id="23" name="Rounded Rectangle 22"/>
+                <a:spcPct val="130000"/>
+              </a:lnSpc>
+              <a:spcAft>
+                <a:spcPts val="300"/>
+              </a:spcAft>
+            </a:pPr>
+            <a:r>
+              <a:rPr sz="600" b="0">
+                <a:solidFill>
+                  <a:srgbClr val="C00000"/>
+                </a:solidFill>
+                <a:latin typeface="微软雅黑"/>
+                <a:ea typeface="微软雅黑"/>
+              </a:rPr>
+              <a:t>● </a:t>
+            </a:r>
+            <a:r>
+              <a:rPr sz="850" b="1">
+                <a:solidFill>
+                  <a:srgbClr val="000000"/>
+                </a:solidFill>
+                <a:latin typeface="微软雅黑"/>
+                <a:ea typeface="微软雅黑"/>
+              </a:rPr>
+              <a:t>新特性设计文档、新模块设计文档</a:t>
+            </a:r>
+            <a:r>
+              <a:rPr sz="850" b="0">
+                <a:solidFill>
+                  <a:srgbClr val="000000"/>
+                </a:solidFill>
+                <a:latin typeface="微软雅黑"/>
+                <a:ea typeface="微软雅黑"/>
+              </a:rPr>
+              <a:t>等新知识源入库</a:t>
+            </a:r>
+          </a:p>
+          <a:p>
+            <a:pPr algn="l">
+              <a:lnSpc>
+                <a:spcPct val="130000"/>
+              </a:lnSpc>
+              <a:spcAft>
+                <a:spcPts val="300"/>
+              </a:spcAft>
+            </a:pPr>
+            <a:r>
+              <a:rPr sz="600" b="0">
+                <a:solidFill>
+                  <a:srgbClr val="C00000"/>
+                </a:solidFill>
+                <a:latin typeface="微软雅黑"/>
+                <a:ea typeface="微软雅黑"/>
+              </a:rPr>
+              <a:t>● </a:t>
+            </a:r>
+            <a:r>
+              <a:rPr sz="850" b="0">
+                <a:solidFill>
+                  <a:srgbClr val="000000"/>
+                </a:solidFill>
+                <a:latin typeface="微软雅黑"/>
+                <a:ea typeface="微软雅黑"/>
+              </a:rPr>
+              <a:t>与 OpenSpec 联动：</a:t>
+            </a:r>
+            <a:r>
+              <a:rPr sz="850" b="1">
+                <a:solidFill>
+                  <a:srgbClr val="0000FF"/>
+                </a:solidFill>
+                <a:latin typeface="微软雅黑"/>
+                <a:ea typeface="微软雅黑"/>
+              </a:rPr>
+              <a:t>/opsx:archive</a:t>
+            </a:r>
+            <a:r>
+              <a:rPr sz="850" b="0">
+                <a:solidFill>
+                  <a:srgbClr val="000000"/>
+                </a:solidFill>
+                <a:latin typeface="微软雅黑"/>
+                <a:ea typeface="微软雅黑"/>
+              </a:rPr>
+              <a:t> 归档即触发对应 wiki 页</a:t>
+            </a:r>
+            <a:r>
+              <a:rPr sz="850" b="1">
+                <a:solidFill>
+                  <a:srgbClr val="000000"/>
+                </a:solidFill>
+                <a:latin typeface="微软雅黑"/>
+                <a:ea typeface="微软雅黑"/>
+              </a:rPr>
+              <a:t>增量刷新</a:t>
+            </a:r>
+          </a:p>
+        </p:txBody>
+      </p:sp>
+      <p:sp>
+        <p:nvSpPr>
+          <p:cNvPr id="48" name="Rounded Rectangle 47"/>
           <p:cNvSpPr/>
           <p:nvPr/>
         </p:nvSpPr>
         <p:spPr>
           <a:xfrm>
-            <a:off x="8115300" y="1428750"/>
-            <a:ext cx="3657600" cy="2914650"/>
+            <a:off x="3295650" y="3905250"/>
+            <a:ext cx="2724150" cy="1504950"/>
           </a:xfrm>
           <a:prstGeom prst="roundRect">
             <a:avLst>
@@ -9415,14 +10848,14 @@
       </p:sp>
       <p:sp>
         <p:nvSpPr>
-          <p:cNvPr id="24" name="Rectangle 23"/>
+          <p:cNvPr id="49" name="Rectangle 48"/>
           <p:cNvSpPr/>
           <p:nvPr/>
         </p:nvSpPr>
         <p:spPr>
           <a:xfrm>
-            <a:off x="8153400" y="1428750"/>
-            <a:ext cx="3581400" cy="38100"/>
+            <a:off x="3333750" y="3905250"/>
+            <a:ext cx="2647950" cy="38100"/>
           </a:xfrm>
           <a:prstGeom prst="rect">
             <a:avLst/>
@@ -9459,14 +10892,14 @@
       </p:sp>
       <p:sp>
         <p:nvSpPr>
-          <p:cNvPr id="25" name="TextBox 24"/>
+          <p:cNvPr id="50" name="TextBox 49"/>
           <p:cNvSpPr txBox="1"/>
           <p:nvPr/>
         </p:nvSpPr>
         <p:spPr>
           <a:xfrm>
-            <a:off x="8267700" y="1562100"/>
-            <a:ext cx="3352800" cy="190500"/>
+            <a:off x="3429000" y="4019550"/>
+            <a:ext cx="1905000" cy="171450"/>
           </a:xfrm>
           <a:prstGeom prst="rect">
             <a:avLst/>
@@ -9474,7 +10907,7 @@
           <a:noFill/>
         </p:spPr>
         <p:txBody>
-          <a:bodyPr wrap="square" anchor="t" lIns="0" rIns="0" tIns="0" bIns="0">
+          <a:bodyPr wrap="none" anchor="t" lIns="0" rIns="0" tIns="0" bIns="0">
             <a:spAutoFit/>
           </a:bodyPr>
           <a:lstStyle/>
@@ -9488,283 +10921,41 @@
               </a:spcAft>
             </a:pPr>
             <a:r>
-              <a:rPr sz="1250" b="1">
+              <a:rPr sz="1050" b="1">
                 <a:solidFill>
                   <a:srgbClr val="000000"/>
                 </a:solidFill>
                 <a:latin typeface="微软雅黑"/>
                 <a:ea typeface="微软雅黑"/>
               </a:rPr>
-              <a:t>工作包③ 闭环与保鲜机制</a:t>
-            </a:r>
-          </a:p>
-        </p:txBody>
-      </p:sp>
-      <p:sp>
-        <p:nvSpPr>
-          <p:cNvPr id="26" name="TextBox 25"/>
-          <p:cNvSpPr txBox="1"/>
-          <p:nvPr/>
-        </p:nvSpPr>
-        <p:spPr>
-          <a:xfrm>
-            <a:off x="8267700" y="1790700"/>
-            <a:ext cx="3352800" cy="152400"/>
-          </a:xfrm>
-          <a:prstGeom prst="rect">
-            <a:avLst/>
-          </a:prstGeom>
-          <a:noFill/>
-        </p:spPr>
-        <p:txBody>
-          <a:bodyPr wrap="square" anchor="t" lIns="0" rIns="0" tIns="0" bIns="0">
-            <a:spAutoFit/>
-          </a:bodyPr>
-          <a:lstStyle/>
-          <a:p>
-            <a:pPr algn="l">
-              <a:lnSpc>
-                <a:spcPct val="125000"/>
-              </a:lnSpc>
-              <a:spcAft>
-                <a:spcPts val="200"/>
-              </a:spcAft>
-            </a:pPr>
-            <a:r>
-              <a:rPr sz="950" b="1">
-                <a:solidFill>
-                  <a:srgbClr val="0000FF"/>
-                </a:solidFill>
-                <a:latin typeface="微软雅黑"/>
-                <a:ea typeface="微软雅黑"/>
-              </a:rPr>
-              <a:t>决定知识库存亡 · 复利来源</a:t>
-            </a:r>
-          </a:p>
-        </p:txBody>
-      </p:sp>
-      <p:sp>
-        <p:nvSpPr>
-          <p:cNvPr id="27" name="TextBox 26"/>
-          <p:cNvSpPr txBox="1"/>
-          <p:nvPr/>
-        </p:nvSpPr>
-        <p:spPr>
-          <a:xfrm>
-            <a:off x="8267700" y="2000250"/>
-            <a:ext cx="3352800" cy="1809750"/>
-          </a:xfrm>
-          <a:prstGeom prst="rect">
-            <a:avLst/>
-          </a:prstGeom>
-          <a:noFill/>
-        </p:spPr>
-        <p:txBody>
-          <a:bodyPr wrap="square" anchor="t" lIns="0" rIns="0" tIns="0" bIns="0">
-            <a:spAutoFit/>
-          </a:bodyPr>
-          <a:lstStyle/>
-          <a:p>
-            <a:pPr algn="l">
-              <a:lnSpc>
-                <a:spcPct val="130000"/>
-              </a:lnSpc>
-              <a:spcAft>
-                <a:spcPts val="300"/>
-              </a:spcAft>
-            </a:pPr>
-            <a:r>
-              <a:rPr sz="600" b="0">
-                <a:solidFill>
-                  <a:srgbClr val="C00000"/>
-                </a:solidFill>
-                <a:latin typeface="微软雅黑"/>
-                <a:ea typeface="微软雅黑"/>
-              </a:rPr>
-              <a:t>● </a:t>
-            </a:r>
-            <a:r>
-              <a:rPr sz="950" b="1">
-                <a:solidFill>
-                  <a:srgbClr val="000000"/>
-                </a:solidFill>
-                <a:latin typeface="微软雅黑"/>
-                <a:ea typeface="微软雅黑"/>
-              </a:rPr>
-              <a:t>OpenSpec 联动</a:t>
-            </a:r>
-            <a:r>
-              <a:rPr sz="950" b="0">
-                <a:solidFill>
-                  <a:srgbClr val="000000"/>
-                </a:solidFill>
-                <a:latin typeface="微软雅黑"/>
-                <a:ea typeface="微软雅黑"/>
-              </a:rPr>
-              <a:t>：</a:t>
-            </a:r>
-            <a:r>
-              <a:rPr sz="950" b="1">
-                <a:solidFill>
-                  <a:srgbClr val="0000FF"/>
-                </a:solidFill>
-                <a:latin typeface="微软雅黑"/>
-                <a:ea typeface="微软雅黑"/>
-              </a:rPr>
-              <a:t>/opsx:archive</a:t>
-            </a:r>
-            <a:r>
-              <a:rPr sz="950" b="0">
-                <a:solidFill>
-                  <a:srgbClr val="000000"/>
-                </a:solidFill>
-                <a:latin typeface="微软雅黑"/>
-                <a:ea typeface="微软雅黑"/>
-              </a:rPr>
-              <a:t> 归档时同步检查受影响 wiki 页</a:t>
-            </a:r>
-          </a:p>
-          <a:p>
-            <a:pPr algn="l">
-              <a:lnSpc>
-                <a:spcPct val="130000"/>
-              </a:lnSpc>
-              <a:spcAft>
-                <a:spcPts val="300"/>
-              </a:spcAft>
-            </a:pPr>
-            <a:r>
-              <a:rPr sz="600" b="0">
-                <a:solidFill>
-                  <a:srgbClr val="C00000"/>
-                </a:solidFill>
-                <a:latin typeface="微软雅黑"/>
-                <a:ea typeface="微软雅黑"/>
-              </a:rPr>
-              <a:t>● </a:t>
-            </a:r>
-            <a:r>
-              <a:rPr sz="950" b="1">
-                <a:solidFill>
-                  <a:srgbClr val="000000"/>
-                </a:solidFill>
-                <a:latin typeface="微软雅黑"/>
-                <a:ea typeface="微软雅黑"/>
-              </a:rPr>
-              <a:t>错误回写</a:t>
-            </a:r>
-            <a:r>
-              <a:rPr sz="950" b="0">
-                <a:solidFill>
-                  <a:srgbClr val="000000"/>
-                </a:solidFill>
-                <a:latin typeface="微软雅黑"/>
-                <a:ea typeface="微软雅黑"/>
-              </a:rPr>
-              <a:t>：Agent 犯错 → 修正 → 教训写进 pitfalls/ 或约束页（一句话即可）</a:t>
-            </a:r>
-          </a:p>
-          <a:p>
-            <a:pPr algn="l">
-              <a:lnSpc>
-                <a:spcPct val="130000"/>
-              </a:lnSpc>
-              <a:spcAft>
-                <a:spcPts val="300"/>
-              </a:spcAft>
-            </a:pPr>
-            <a:r>
-              <a:rPr sz="600" b="0">
-                <a:solidFill>
-                  <a:srgbClr val="C00000"/>
-                </a:solidFill>
-                <a:latin typeface="微软雅黑"/>
-                <a:ea typeface="微软雅黑"/>
-              </a:rPr>
-              <a:t>● </a:t>
-            </a:r>
-            <a:r>
-              <a:rPr sz="950" b="1">
-                <a:solidFill>
-                  <a:srgbClr val="000000"/>
-                </a:solidFill>
-                <a:latin typeface="微软雅黑"/>
-                <a:ea typeface="微软雅黑"/>
-              </a:rPr>
-              <a:t>CI 巡检</a:t>
-            </a:r>
-            <a:r>
-              <a:rPr sz="950" b="0">
-                <a:solidFill>
-                  <a:srgbClr val="000000"/>
-                </a:solidFill>
-                <a:latin typeface="微软雅黑"/>
-                <a:ea typeface="微软雅黑"/>
-              </a:rPr>
-              <a:t>：wiki lint（死链、目录一致性），搭 openspec validate 的车</a:t>
-            </a:r>
-          </a:p>
-          <a:p>
-            <a:pPr algn="l">
-              <a:lnSpc>
-                <a:spcPct val="130000"/>
-              </a:lnSpc>
-              <a:spcAft>
-                <a:spcPts val="300"/>
-              </a:spcAft>
-            </a:pPr>
-            <a:r>
-              <a:rPr sz="600" b="0">
-                <a:solidFill>
-                  <a:srgbClr val="C00000"/>
-                </a:solidFill>
-                <a:latin typeface="微软雅黑"/>
-                <a:ea typeface="微软雅黑"/>
-              </a:rPr>
-              <a:t>● </a:t>
-            </a:r>
-            <a:r>
-              <a:rPr sz="950" b="1">
-                <a:solidFill>
-                  <a:srgbClr val="000000"/>
-                </a:solidFill>
-                <a:latin typeface="微软雅黑"/>
-                <a:ea typeface="微软雅黑"/>
-              </a:rPr>
-              <a:t>痛点观测</a:t>
-            </a:r>
-            <a:r>
-              <a:rPr sz="950" b="0">
-                <a:solidFill>
-                  <a:srgbClr val="000000"/>
-                </a:solidFill>
-                <a:latin typeface="微软雅黑"/>
-                <a:ea typeface="微软雅黑"/>
-              </a:rPr>
-              <a:t>：记录检索失败案例；"概念找不到"高频出现时，再评估向量层</a:t>
-            </a:r>
-          </a:p>
-        </p:txBody>
-      </p:sp>
-      <p:sp>
-        <p:nvSpPr>
-          <p:cNvPr id="28" name="Rectangle 27"/>
+              <a:t>触发器② 知识测评</a:t>
+            </a:r>
+          </a:p>
+        </p:txBody>
+      </p:sp>
+      <p:sp>
+        <p:nvSpPr>
+          <p:cNvPr id="51" name="Rounded Rectangle 50"/>
           <p:cNvSpPr/>
           <p:nvPr/>
         </p:nvSpPr>
         <p:spPr>
           <a:xfrm>
-            <a:off x="8229600" y="3943350"/>
-            <a:ext cx="3429000" cy="304800"/>
-          </a:xfrm>
-          <a:prstGeom prst="rect">
-            <a:avLst/>
+            <a:off x="5505450" y="4019550"/>
+            <a:ext cx="400050" cy="171450"/>
+          </a:xfrm>
+          <a:prstGeom prst="roundRect">
+            <a:avLst>
+              <a:gd name="adj" fmla="val 30000"/>
+            </a:avLst>
           </a:prstGeom>
           <a:solidFill>
-            <a:srgbClr val="F2F2F2"/>
+            <a:srgbClr val="FFF7F7"/>
           </a:solidFill>
-          <a:ln>
-            <a:noFill/>
+          <a:ln w="9525">
+            <a:solidFill>
+              <a:srgbClr val="C00000"/>
+            </a:solidFill>
           </a:ln>
           <a:effectLst/>
         </p:spPr>
@@ -9783,7 +10974,7 @@
           </a:fontRef>
         </p:style>
         <p:txBody>
-          <a:bodyPr rtlCol="0" anchor="ctr"/>
+          <a:bodyPr rtlCol="0" anchor="ctr" lIns="0" rIns="0"/>
           <a:lstStyle/>
           <a:p>
             <a:pPr algn="ctr"/>
@@ -9792,14 +10983,14 @@
       </p:sp>
       <p:sp>
         <p:nvSpPr>
-          <p:cNvPr id="29" name="TextBox 28"/>
+          <p:cNvPr id="52" name="TextBox 51"/>
           <p:cNvSpPr txBox="1"/>
           <p:nvPr/>
         </p:nvSpPr>
         <p:spPr>
           <a:xfrm>
-            <a:off x="8324850" y="3943350"/>
-            <a:ext cx="3238500" cy="304800"/>
+            <a:off x="5505450" y="4038600"/>
+            <a:ext cx="400050" cy="133350"/>
           </a:xfrm>
           <a:prstGeom prst="rect">
             <a:avLst/>
@@ -9807,42 +10998,145 @@
           <a:noFill/>
         </p:spPr>
         <p:txBody>
-          <a:bodyPr wrap="square" anchor="ctr" lIns="0" rIns="0" tIns="0" bIns="0">
+          <a:bodyPr wrap="square" anchor="t" lIns="0" rIns="0" tIns="0" bIns="0">
             <a:spAutoFit/>
           </a:bodyPr>
           <a:lstStyle/>
           <a:p>
+            <a:pPr algn="ctr">
+              <a:lnSpc>
+                <a:spcPct val="125000"/>
+              </a:lnSpc>
+              <a:spcAft>
+                <a:spcPts val="200"/>
+              </a:spcAft>
+            </a:pPr>
+            <a:r>
+              <a:rPr sz="800" b="1">
+                <a:solidFill>
+                  <a:srgbClr val="C00000"/>
+                </a:solidFill>
+                <a:latin typeface="微软雅黑"/>
+                <a:ea typeface="微软雅黑"/>
+              </a:rPr>
+              <a:t>③→②</a:t>
+            </a:r>
+          </a:p>
+        </p:txBody>
+      </p:sp>
+      <p:sp>
+        <p:nvSpPr>
+          <p:cNvPr id="53" name="TextBox 52"/>
+          <p:cNvSpPr txBox="1"/>
+          <p:nvPr/>
+        </p:nvSpPr>
+        <p:spPr>
+          <a:xfrm>
+            <a:off x="3429000" y="4267200"/>
+            <a:ext cx="2476500" cy="1066800"/>
+          </a:xfrm>
+          <a:prstGeom prst="rect">
+            <a:avLst/>
+          </a:prstGeom>
+          <a:noFill/>
+        </p:spPr>
+        <p:txBody>
+          <a:bodyPr wrap="square" anchor="t" lIns="0" rIns="0" tIns="0" bIns="0">
+            <a:spAutoFit/>
+          </a:bodyPr>
+          <a:lstStyle/>
+          <a:p>
             <a:pPr algn="l">
               <a:lnSpc>
-                <a:spcPct val="125000"/>
-              </a:lnSpc>
-              <a:spcAft>
-                <a:spcPts val="200"/>
-              </a:spcAft>
-            </a:pPr>
-            <a:r>
-              <a:rPr sz="900" b="1">
-                <a:solidFill>
-                  <a:srgbClr val="333333"/>
-                </a:solidFill>
-                <a:latin typeface="微软雅黑"/>
-                <a:ea typeface="微软雅黑"/>
-              </a:rPr>
-              <a:t>产出：知识随代码演进而复利，不腐化</a:t>
-            </a:r>
-          </a:p>
-        </p:txBody>
-      </p:sp>
-      <p:sp>
-        <p:nvSpPr>
-          <p:cNvPr id="30" name="Rounded Rectangle 29"/>
+                <a:spcPct val="130000"/>
+              </a:lnSpc>
+              <a:spcAft>
+                <a:spcPts val="300"/>
+              </a:spcAft>
+            </a:pPr>
+            <a:r>
+              <a:rPr sz="600" b="0">
+                <a:solidFill>
+                  <a:srgbClr val="C00000"/>
+                </a:solidFill>
+                <a:latin typeface="微软雅黑"/>
+                <a:ea typeface="微软雅黑"/>
+              </a:rPr>
+              <a:t>● </a:t>
+            </a:r>
+            <a:r>
+              <a:rPr sz="850" b="0">
+                <a:solidFill>
+                  <a:srgbClr val="000000"/>
+                </a:solidFill>
+                <a:latin typeface="微软雅黑"/>
+                <a:ea typeface="微软雅黑"/>
+              </a:rPr>
+              <a:t>题库抽检识别</a:t>
+            </a:r>
+            <a:r>
+              <a:rPr sz="850" b="1">
+                <a:solidFill>
+                  <a:srgbClr val="000000"/>
+                </a:solidFill>
+                <a:latin typeface="微软雅黑"/>
+                <a:ea typeface="微软雅黑"/>
+              </a:rPr>
+              <a:t>错误 / 不完善 / 过时</a:t>
+            </a:r>
+            <a:r>
+              <a:rPr sz="850" b="0">
+                <a:solidFill>
+                  <a:srgbClr val="000000"/>
+                </a:solidFill>
+                <a:latin typeface="微软雅黑"/>
+                <a:ea typeface="微软雅黑"/>
+              </a:rPr>
+              <a:t>知识 → 定向刷新</a:t>
+            </a:r>
+          </a:p>
+          <a:p>
+            <a:pPr algn="l">
+              <a:lnSpc>
+                <a:spcPct val="130000"/>
+              </a:lnSpc>
+              <a:spcAft>
+                <a:spcPts val="300"/>
+              </a:spcAft>
+            </a:pPr>
+            <a:r>
+              <a:rPr sz="600" b="0">
+                <a:solidFill>
+                  <a:srgbClr val="C00000"/>
+                </a:solidFill>
+                <a:latin typeface="微软雅黑"/>
+                <a:ea typeface="微软雅黑"/>
+              </a:rPr>
+              <a:t>● </a:t>
+            </a:r>
+            <a:r>
+              <a:rPr sz="850" b="0">
+                <a:solidFill>
+                  <a:srgbClr val="000000"/>
+                </a:solidFill>
+                <a:latin typeface="微软雅黑"/>
+                <a:ea typeface="微软雅黑"/>
+              </a:rPr>
+              <a:t>wiki lint（死链、目录一致性）进 CI，失败即阻断合入</a:t>
+            </a:r>
+          </a:p>
+        </p:txBody>
+      </p:sp>
+      <p:sp>
+        <p:nvSpPr>
+          <p:cNvPr id="54" name="Rounded Rectangle 53"/>
           <p:cNvSpPr/>
           <p:nvPr/>
         </p:nvSpPr>
         <p:spPr>
           <a:xfrm>
-            <a:off x="419100" y="4476750"/>
-            <a:ext cx="11353800" cy="2000250"/>
+            <a:off x="6172200" y="3905250"/>
+            <a:ext cx="2724150" cy="1504950"/>
           </a:xfrm>
           <a:prstGeom prst="roundRect">
             <a:avLst>
@@ -9883,14 +11177,14 @@
       </p:sp>
       <p:sp>
         <p:nvSpPr>
-          <p:cNvPr id="31" name="Rectangle 30"/>
+          <p:cNvPr id="55" name="Rectangle 54"/>
           <p:cNvSpPr/>
           <p:nvPr/>
         </p:nvSpPr>
         <p:spPr>
           <a:xfrm>
-            <a:off x="552450" y="4619625"/>
-            <a:ext cx="76200" cy="76200"/>
+            <a:off x="6210300" y="3905250"/>
+            <a:ext cx="2647950" cy="38100"/>
           </a:xfrm>
           <a:prstGeom prst="rect">
             <a:avLst/>
@@ -9927,14 +11221,14 @@
       </p:sp>
       <p:sp>
         <p:nvSpPr>
-          <p:cNvPr id="32" name="TextBox 31"/>
+          <p:cNvPr id="56" name="TextBox 55"/>
           <p:cNvSpPr txBox="1"/>
           <p:nvPr/>
         </p:nvSpPr>
         <p:spPr>
           <a:xfrm>
-            <a:off x="685800" y="4552950"/>
-            <a:ext cx="7620000" cy="190500"/>
+            <a:off x="6305550" y="4019550"/>
+            <a:ext cx="1905000" cy="171450"/>
           </a:xfrm>
           <a:prstGeom prst="rect">
             <a:avLst/>
@@ -9942,7 +11236,7 @@
           <a:noFill/>
         </p:spPr>
         <p:txBody>
-          <a:bodyPr wrap="square" anchor="t" lIns="0" rIns="0" tIns="0" bIns="0">
+          <a:bodyPr wrap="none" anchor="t" lIns="0" rIns="0" tIns="0" bIns="0">
             <a:spAutoFit/>
           </a:bodyPr>
           <a:lstStyle/>
@@ -9956,81 +11250,38 @@
               </a:spcAft>
             </a:pPr>
             <a:r>
-              <a:rPr sz="1200" b="1">
+              <a:rPr sz="1050" b="1">
                 <a:solidFill>
                   <a:srgbClr val="000000"/>
                 </a:solidFill>
                 <a:latin typeface="微软雅黑"/>
                 <a:ea typeface="微软雅黑"/>
               </a:rPr>
-              <a:t>两个关键闭环（比任何检索基础设施都更接近"一次写对"）</a:t>
-            </a:r>
-          </a:p>
-        </p:txBody>
-      </p:sp>
-      <p:sp>
-        <p:nvSpPr>
-          <p:cNvPr id="33" name="TextBox 32"/>
-          <p:cNvSpPr txBox="1"/>
-          <p:nvPr/>
-        </p:nvSpPr>
-        <p:spPr>
-          <a:xfrm>
-            <a:off x="552450" y="4876800"/>
-            <a:ext cx="2476500" cy="171450"/>
-          </a:xfrm>
-          <a:prstGeom prst="rect">
-            <a:avLst/>
-          </a:prstGeom>
-          <a:noFill/>
-        </p:spPr>
-        <p:txBody>
-          <a:bodyPr wrap="square" anchor="t" lIns="0" rIns="0" tIns="0" bIns="0">
-            <a:spAutoFit/>
-          </a:bodyPr>
-          <a:lstStyle/>
-          <a:p>
-            <a:pPr algn="l">
-              <a:lnSpc>
-                <a:spcPct val="125000"/>
-              </a:lnSpc>
-              <a:spcAft>
-                <a:spcPts val="200"/>
-              </a:spcAft>
-            </a:pPr>
-            <a:r>
-              <a:rPr sz="1050" b="1">
-                <a:solidFill>
-                  <a:srgbClr val="C00000"/>
-                </a:solidFill>
-                <a:latin typeface="微软雅黑"/>
-                <a:ea typeface="微软雅黑"/>
-              </a:rPr>
-              <a:t>闭环 1：错误 → 教训回写</a:t>
-            </a:r>
-          </a:p>
-        </p:txBody>
-      </p:sp>
-      <p:sp>
-        <p:nvSpPr>
-          <p:cNvPr id="34" name="Rounded Rectangle 33"/>
+              <a:t>触发器③ 消费端反馈</a:t>
+            </a:r>
+          </a:p>
+        </p:txBody>
+      </p:sp>
+      <p:sp>
+        <p:nvSpPr>
+          <p:cNvPr id="57" name="Rounded Rectangle 56"/>
           <p:cNvSpPr/>
           <p:nvPr/>
         </p:nvSpPr>
         <p:spPr>
           <a:xfrm>
-            <a:off x="552450" y="5124450"/>
-            <a:ext cx="1428750" cy="438150"/>
+            <a:off x="8382000" y="4019550"/>
+            <a:ext cx="400050" cy="171450"/>
           </a:xfrm>
           <a:prstGeom prst="roundRect">
             <a:avLst>
-              <a:gd name="adj" fmla="val 8000"/>
+              <a:gd name="adj" fmla="val 30000"/>
             </a:avLst>
           </a:prstGeom>
           <a:solidFill>
             <a:srgbClr val="FFF7F7"/>
           </a:solidFill>
-          <a:ln w="12700">
+          <a:ln w="9525">
             <a:solidFill>
               <a:srgbClr val="C00000"/>
             </a:solidFill>
@@ -10061,14 +11312,14 @@
       </p:sp>
       <p:sp>
         <p:nvSpPr>
-          <p:cNvPr id="35" name="TextBox 34"/>
+          <p:cNvPr id="58" name="TextBox 57"/>
           <p:cNvSpPr txBox="1"/>
           <p:nvPr/>
         </p:nvSpPr>
         <p:spPr>
           <a:xfrm>
-            <a:off x="552450" y="5238750"/>
-            <a:ext cx="1428750" cy="171450"/>
+            <a:off x="8382000" y="4038600"/>
+            <a:ext cx="400050" cy="133350"/>
           </a:xfrm>
           <a:prstGeom prst="rect">
             <a:avLst/>
@@ -10090,65 +11341,151 @@
               </a:spcAft>
             </a:pPr>
             <a:r>
-              <a:rPr sz="950" b="0">
+              <a:rPr sz="800" b="1">
+                <a:solidFill>
+                  <a:srgbClr val="C00000"/>
+                </a:solidFill>
+                <a:latin typeface="微软雅黑"/>
+                <a:ea typeface="微软雅黑"/>
+              </a:rPr>
+              <a:t>④→②</a:t>
+            </a:r>
+          </a:p>
+        </p:txBody>
+      </p:sp>
+      <p:sp>
+        <p:nvSpPr>
+          <p:cNvPr id="59" name="TextBox 58"/>
+          <p:cNvSpPr txBox="1"/>
+          <p:nvPr/>
+        </p:nvSpPr>
+        <p:spPr>
+          <a:xfrm>
+            <a:off x="6305550" y="4267200"/>
+            <a:ext cx="2476500" cy="1066800"/>
+          </a:xfrm>
+          <a:prstGeom prst="rect">
+            <a:avLst/>
+          </a:prstGeom>
+          <a:noFill/>
+        </p:spPr>
+        <p:txBody>
+          <a:bodyPr wrap="square" anchor="t" lIns="0" rIns="0" tIns="0" bIns="0">
+            <a:spAutoFit/>
+          </a:bodyPr>
+          <a:lstStyle/>
+          <a:p>
+            <a:pPr algn="l">
+              <a:lnSpc>
+                <a:spcPct val="130000"/>
+              </a:lnSpc>
+              <a:spcAft>
+                <a:spcPts val="300"/>
+              </a:spcAft>
+            </a:pPr>
+            <a:r>
+              <a:rPr sz="600" b="0">
+                <a:solidFill>
+                  <a:srgbClr val="C00000"/>
+                </a:solidFill>
+                <a:latin typeface="微软雅黑"/>
+                <a:ea typeface="微软雅黑"/>
+              </a:rPr>
+              <a:t>● </a:t>
+            </a:r>
+            <a:r>
+              <a:rPr sz="850" b="0">
                 <a:solidFill>
                   <a:srgbClr val="000000"/>
                 </a:solidFill>
                 <a:latin typeface="微软雅黑"/>
                 <a:ea typeface="微软雅黑"/>
               </a:rPr>
-              <a:t>Agent 写错代码</a:t>
-            </a:r>
-          </a:p>
-        </p:txBody>
-      </p:sp>
-      <p:cxnSp>
-        <p:nvCxnSpPr>
-          <p:cNvPr id="36" name="Connector 35"/>
-          <p:cNvCxnSpPr/>
-          <p:nvPr/>
-        </p:nvCxnSpPr>
-        <p:spPr>
-          <a:xfrm>
-            <a:off x="1981200" y="5343525"/>
-            <a:ext cx="190500" cy="0"/>
-          </a:xfrm>
-          <a:prstGeom prst="line">
-            <a:avLst/>
-          </a:prstGeom>
-          <a:ln w="19050">
-            <a:solidFill>
-              <a:srgbClr val="C00000"/>
-            </a:solidFill>
-            <a:tailEnd type="triangle" w="med" len="med"/>
-          </a:ln>
-          <a:effectLst/>
-        </p:spPr>
-        <p:style>
-          <a:lnRef idx="2">
-            <a:schemeClr val="accent1"/>
-          </a:lnRef>
-          <a:fillRef idx="0">
-            <a:schemeClr val="accent1"/>
-          </a:fillRef>
-          <a:effectRef idx="1">
-            <a:schemeClr val="accent1"/>
-          </a:effectRef>
-          <a:fontRef idx="minor">
-            <a:schemeClr val="tx1"/>
-          </a:fontRef>
-        </p:style>
-      </p:cxnSp>
-      <p:sp>
-        <p:nvSpPr>
-          <p:cNvPr id="37" name="Rounded Rectangle 36"/>
+              <a:t>问答 / 编码 / 设计中发现知识错误或不可用 → </a:t>
+            </a:r>
+            <a:r>
+              <a:rPr sz="850" b="1">
+                <a:solidFill>
+                  <a:srgbClr val="000000"/>
+                </a:solidFill>
+                <a:latin typeface="微软雅黑"/>
+                <a:ea typeface="微软雅黑"/>
+              </a:rPr>
+              <a:t>轻量反馈通道</a:t>
+            </a:r>
+            <a:r>
+              <a:rPr sz="850" b="0">
+                <a:solidFill>
+                  <a:srgbClr val="000000"/>
+                </a:solidFill>
+                <a:latin typeface="微软雅黑"/>
+                <a:ea typeface="微软雅黑"/>
+              </a:rPr>
+              <a:t>（一键提单）</a:t>
+            </a:r>
+          </a:p>
+          <a:p>
+            <a:pPr algn="l">
+              <a:lnSpc>
+                <a:spcPct val="130000"/>
+              </a:lnSpc>
+              <a:spcAft>
+                <a:spcPts val="300"/>
+              </a:spcAft>
+            </a:pPr>
+            <a:r>
+              <a:rPr sz="600" b="0">
+                <a:solidFill>
+                  <a:srgbClr val="C00000"/>
+                </a:solidFill>
+                <a:latin typeface="微软雅黑"/>
+                <a:ea typeface="微软雅黑"/>
+              </a:rPr>
+              <a:t>● </a:t>
+            </a:r>
+            <a:r>
+              <a:rPr sz="850" b="0">
+                <a:solidFill>
+                  <a:srgbClr val="000000"/>
+                </a:solidFill>
+                <a:latin typeface="微软雅黑"/>
+                <a:ea typeface="微软雅黑"/>
+              </a:rPr>
+              <a:t>修正后</a:t>
+            </a:r>
+            <a:r>
+              <a:rPr sz="850" b="1">
+                <a:solidFill>
+                  <a:srgbClr val="000000"/>
+                </a:solidFill>
+                <a:latin typeface="微软雅黑"/>
+                <a:ea typeface="微软雅黑"/>
+              </a:rPr>
+              <a:t>回写知识库</a:t>
+            </a:r>
+            <a:r>
+              <a:rPr sz="850" b="0">
+                <a:solidFill>
+                  <a:srgbClr val="000000"/>
+                </a:solidFill>
+                <a:latin typeface="微软雅黑"/>
+                <a:ea typeface="微软雅黑"/>
+              </a:rPr>
+              <a:t>并记录案例，沉淀为测评题</a:t>
+            </a:r>
+          </a:p>
+        </p:txBody>
+      </p:sp>
+      <p:sp>
+        <p:nvSpPr>
+          <p:cNvPr id="60" name="Rounded Rectangle 59"/>
           <p:cNvSpPr/>
           <p:nvPr/>
         </p:nvSpPr>
         <p:spPr>
           <a:xfrm>
-            <a:off x="2171700" y="5124450"/>
-            <a:ext cx="1428750" cy="438150"/>
+            <a:off x="9048750" y="3905250"/>
+            <a:ext cx="2724150" cy="1504950"/>
           </a:xfrm>
           <a:prstGeom prst="roundRect">
             <a:avLst>
@@ -10156,9 +11493,144 @@
             </a:avLst>
           </a:prstGeom>
           <a:solidFill>
+            <a:srgbClr val="FFFFFF"/>
+          </a:solidFill>
+          <a:ln w="12700">
+            <a:solidFill>
+              <a:srgbClr val="D9D9D9"/>
+            </a:solidFill>
+          </a:ln>
+          <a:effectLst/>
+        </p:spPr>
+        <p:style>
+          <a:lnRef idx="1">
+            <a:schemeClr val="accent1"/>
+          </a:lnRef>
+          <a:fillRef idx="3">
+            <a:schemeClr val="accent1"/>
+          </a:fillRef>
+          <a:effectRef idx="2">
+            <a:schemeClr val="accent1"/>
+          </a:effectRef>
+          <a:fontRef idx="minor">
+            <a:schemeClr val="lt1"/>
+          </a:fontRef>
+        </p:style>
+        <p:txBody>
+          <a:bodyPr rtlCol="0" anchor="ctr" lIns="0" rIns="0"/>
+          <a:lstStyle/>
+          <a:p>
+            <a:pPr algn="ctr"/>
+          </a:p>
+        </p:txBody>
+      </p:sp>
+      <p:sp>
+        <p:nvSpPr>
+          <p:cNvPr id="61" name="Rectangle 60"/>
+          <p:cNvSpPr/>
+          <p:nvPr/>
+        </p:nvSpPr>
+        <p:spPr>
+          <a:xfrm>
+            <a:off x="9086850" y="3905250"/>
+            <a:ext cx="2647950" cy="38100"/>
+          </a:xfrm>
+          <a:prstGeom prst="rect">
+            <a:avLst/>
+          </a:prstGeom>
+          <a:solidFill>
+            <a:srgbClr val="C00000"/>
+          </a:solidFill>
+          <a:ln>
+            <a:noFill/>
+          </a:ln>
+          <a:effectLst/>
+        </p:spPr>
+        <p:style>
+          <a:lnRef idx="1">
+            <a:schemeClr val="accent1"/>
+          </a:lnRef>
+          <a:fillRef idx="3">
+            <a:schemeClr val="accent1"/>
+          </a:fillRef>
+          <a:effectRef idx="2">
+            <a:schemeClr val="accent1"/>
+          </a:effectRef>
+          <a:fontRef idx="minor">
+            <a:schemeClr val="lt1"/>
+          </a:fontRef>
+        </p:style>
+        <p:txBody>
+          <a:bodyPr rtlCol="0" anchor="ctr"/>
+          <a:lstStyle/>
+          <a:p>
+            <a:pPr algn="ctr"/>
+          </a:p>
+        </p:txBody>
+      </p:sp>
+      <p:sp>
+        <p:nvSpPr>
+          <p:cNvPr id="62" name="TextBox 61"/>
+          <p:cNvSpPr txBox="1"/>
+          <p:nvPr/>
+        </p:nvSpPr>
+        <p:spPr>
+          <a:xfrm>
+            <a:off x="9182100" y="4019550"/>
+            <a:ext cx="1905000" cy="171450"/>
+          </a:xfrm>
+          <a:prstGeom prst="rect">
+            <a:avLst/>
+          </a:prstGeom>
+          <a:noFill/>
+        </p:spPr>
+        <p:txBody>
+          <a:bodyPr wrap="none" anchor="t" lIns="0" rIns="0" tIns="0" bIns="0">
+            <a:spAutoFit/>
+          </a:bodyPr>
+          <a:lstStyle/>
+          <a:p>
+            <a:pPr algn="l">
+              <a:lnSpc>
+                <a:spcPct val="125000"/>
+              </a:lnSpc>
+              <a:spcAft>
+                <a:spcPts val="200"/>
+              </a:spcAft>
+            </a:pPr>
+            <a:r>
+              <a:rPr sz="1050" b="1">
+                <a:solidFill>
+                  <a:srgbClr val="000000"/>
+                </a:solidFill>
+                <a:latin typeface="微软雅黑"/>
+                <a:ea typeface="微软雅黑"/>
+              </a:rPr>
+              <a:t>触发器④ 知识调试追踪</a:t>
+            </a:r>
+          </a:p>
+        </p:txBody>
+      </p:sp>
+      <p:sp>
+        <p:nvSpPr>
+          <p:cNvPr id="63" name="Rounded Rectangle 62"/>
+          <p:cNvSpPr/>
+          <p:nvPr/>
+        </p:nvSpPr>
+        <p:spPr>
+          <a:xfrm>
+            <a:off x="11258550" y="4019550"/>
+            <a:ext cx="400050" cy="171450"/>
+          </a:xfrm>
+          <a:prstGeom prst="roundRect">
+            <a:avLst>
+              <a:gd name="adj" fmla="val 30000"/>
+            </a:avLst>
+          </a:prstGeom>
+          <a:solidFill>
             <a:srgbClr val="FFF7F7"/>
           </a:solidFill>
-          <a:ln w="12700">
+          <a:ln w="9525">
             <a:solidFill>
               <a:srgbClr val="C00000"/>
             </a:solidFill>
@@ -10189,14 +11661,14 @@
       </p:sp>
       <p:sp>
         <p:nvSpPr>
-          <p:cNvPr id="38" name="TextBox 37"/>
+          <p:cNvPr id="64" name="TextBox 63"/>
           <p:cNvSpPr txBox="1"/>
           <p:nvPr/>
         </p:nvSpPr>
         <p:spPr>
           <a:xfrm>
-            <a:off x="2171700" y="5238750"/>
-            <a:ext cx="1428750" cy="171450"/>
+            <a:off x="11258550" y="4038600"/>
+            <a:ext cx="400050" cy="133350"/>
           </a:xfrm>
           <a:prstGeom prst="rect">
             <a:avLst/>
@@ -10218,75 +11690,191 @@
               </a:spcAft>
             </a:pPr>
             <a:r>
-              <a:rPr sz="950" b="0">
+              <a:rPr sz="800" b="1">
+                <a:solidFill>
+                  <a:srgbClr val="C00000"/>
+                </a:solidFill>
+                <a:latin typeface="微软雅黑"/>
+                <a:ea typeface="微软雅黑"/>
+              </a:rPr>
+              <a:t>⑤→②</a:t>
+            </a:r>
+          </a:p>
+        </p:txBody>
+      </p:sp>
+      <p:sp>
+        <p:nvSpPr>
+          <p:cNvPr id="65" name="TextBox 64"/>
+          <p:cNvSpPr txBox="1"/>
+          <p:nvPr/>
+        </p:nvSpPr>
+        <p:spPr>
+          <a:xfrm>
+            <a:off x="9182100" y="4267200"/>
+            <a:ext cx="2476500" cy="1066800"/>
+          </a:xfrm>
+          <a:prstGeom prst="rect">
+            <a:avLst/>
+          </a:prstGeom>
+          <a:noFill/>
+        </p:spPr>
+        <p:txBody>
+          <a:bodyPr wrap="square" anchor="t" lIns="0" rIns="0" tIns="0" bIns="0">
+            <a:spAutoFit/>
+          </a:bodyPr>
+          <a:lstStyle/>
+          <a:p>
+            <a:pPr algn="l">
+              <a:lnSpc>
+                <a:spcPct val="130000"/>
+              </a:lnSpc>
+              <a:spcAft>
+                <a:spcPts val="300"/>
+              </a:spcAft>
+            </a:pPr>
+            <a:r>
+              <a:rPr sz="600" b="0">
+                <a:solidFill>
+                  <a:srgbClr val="C00000"/>
+                </a:solidFill>
+                <a:latin typeface="微软雅黑"/>
+                <a:ea typeface="微软雅黑"/>
+              </a:rPr>
+              <a:t>● </a:t>
+            </a:r>
+            <a:r>
+              <a:rPr sz="850" b="0">
                 <a:solidFill>
                   <a:srgbClr val="000000"/>
                 </a:solidFill>
                 <a:latin typeface="微软雅黑"/>
                 <a:ea typeface="微软雅黑"/>
               </a:rPr>
-              <a:t>人工修正 / 评审</a:t>
-            </a:r>
-          </a:p>
-        </p:txBody>
-      </p:sp>
-      <p:cxnSp>
-        <p:nvCxnSpPr>
-          <p:cNvPr id="39" name="Connector 38"/>
-          <p:cNvCxnSpPr/>
-          <p:nvPr/>
-        </p:nvCxnSpPr>
-        <p:spPr>
-          <a:xfrm>
-            <a:off x="3600450" y="5343525"/>
-            <a:ext cx="190500" cy="0"/>
-          </a:xfrm>
-          <a:prstGeom prst="line">
-            <a:avLst/>
-          </a:prstGeom>
-          <a:ln w="19050">
-            <a:solidFill>
-              <a:srgbClr val="C00000"/>
-            </a:solidFill>
-            <a:tailEnd type="triangle" w="med" len="med"/>
-          </a:ln>
-          <a:effectLst/>
-        </p:spPr>
-        <p:style>
-          <a:lnRef idx="2">
-            <a:schemeClr val="accent1"/>
-          </a:lnRef>
-          <a:fillRef idx="0">
-            <a:schemeClr val="accent1"/>
-          </a:fillRef>
-          <a:effectRef idx="1">
-            <a:schemeClr val="accent1"/>
-          </a:effectRef>
-          <a:fontRef idx="minor">
-            <a:schemeClr val="tx1"/>
-          </a:fontRef>
-        </p:style>
-      </p:cxnSp>
-      <p:sp>
-        <p:nvSpPr>
-          <p:cNvPr id="40" name="Rounded Rectangle 39"/>
+              <a:t>在 Claude Code 等 Agent 中</a:t>
+            </a:r>
+            <a:r>
+              <a:rPr sz="850" b="1">
+                <a:solidFill>
+                  <a:srgbClr val="0000FF"/>
+                </a:solidFill>
+                <a:latin typeface="微软雅黑"/>
+                <a:ea typeface="微软雅黑"/>
+              </a:rPr>
+              <a:t>统计 wiki 调用</a:t>
+            </a:r>
+            <a:r>
+              <a:rPr sz="850" b="0">
+                <a:solidFill>
+                  <a:srgbClr val="000000"/>
+                </a:solidFill>
+                <a:latin typeface="微软雅黑"/>
+                <a:ea typeface="微软雅黑"/>
+              </a:rPr>
+              <a:t>：</a:t>
+            </a:r>
+          </a:p>
+          <a:p>
+            <a:pPr algn="l">
+              <a:lnSpc>
+                <a:spcPct val="130000"/>
+              </a:lnSpc>
+              <a:spcAft>
+                <a:spcPts val="300"/>
+              </a:spcAft>
+            </a:pPr>
+            <a:r>
+              <a:rPr sz="600" b="0">
+                <a:solidFill>
+                  <a:srgbClr val="C00000"/>
+                </a:solidFill>
+                <a:latin typeface="微软雅黑"/>
+                <a:ea typeface="微软雅黑"/>
+              </a:rPr>
+              <a:t>● </a:t>
+            </a:r>
+            <a:r>
+              <a:rPr sz="850" b="1">
+                <a:solidFill>
+                  <a:srgbClr val="000000"/>
+                </a:solidFill>
+                <a:latin typeface="微软雅黑"/>
+                <a:ea typeface="微软雅黑"/>
+              </a:rPr>
+              <a:t>热点知识</a:t>
+            </a:r>
+            <a:r>
+              <a:rPr sz="850" b="0">
+                <a:solidFill>
+                  <a:srgbClr val="000000"/>
+                </a:solidFill>
+                <a:latin typeface="微软雅黑"/>
+                <a:ea typeface="微软雅黑"/>
+              </a:rPr>
+              <a:t> → 细化深挖；</a:t>
+            </a:r>
+            <a:r>
+              <a:rPr sz="850" b="1">
+                <a:solidFill>
+                  <a:srgbClr val="000000"/>
+                </a:solidFill>
+                <a:latin typeface="微软雅黑"/>
+                <a:ea typeface="微软雅黑"/>
+              </a:rPr>
+              <a:t>缺失知识</a:t>
+            </a:r>
+            <a:r>
+              <a:rPr sz="850" b="0">
+                <a:solidFill>
+                  <a:srgbClr val="000000"/>
+                </a:solidFill>
+                <a:latin typeface="微软雅黑"/>
+                <a:ea typeface="微软雅黑"/>
+              </a:rPr>
+              <a:t> → 补齐；</a:t>
+            </a:r>
+            <a:r>
+              <a:rPr sz="850" b="1">
+                <a:solidFill>
+                  <a:srgbClr val="000000"/>
+                </a:solidFill>
+                <a:latin typeface="微软雅黑"/>
+                <a:ea typeface="微软雅黑"/>
+              </a:rPr>
+              <a:t>零调用</a:t>
+            </a:r>
+            <a:r>
+              <a:rPr sz="850" b="0">
+                <a:solidFill>
+                  <a:srgbClr val="000000"/>
+                </a:solidFill>
+                <a:latin typeface="微软雅黑"/>
+                <a:ea typeface="微软雅黑"/>
+              </a:rPr>
+              <a:t> → 审视归档瘦身</a:t>
+            </a:r>
+          </a:p>
+        </p:txBody>
+      </p:sp>
+      <p:sp>
+        <p:nvSpPr>
+          <p:cNvPr id="66" name="Rounded Rectangle 65"/>
           <p:cNvSpPr/>
           <p:nvPr/>
         </p:nvSpPr>
         <p:spPr>
           <a:xfrm>
-            <a:off x="3790950" y="5124450"/>
-            <a:ext cx="1428750" cy="438150"/>
+            <a:off x="419100" y="5543550"/>
+            <a:ext cx="11353800" cy="571500"/>
           </a:xfrm>
           <a:prstGeom prst="roundRect">
             <a:avLst>
-              <a:gd name="adj" fmla="val 8000"/>
+              <a:gd name="adj" fmla="val 12000"/>
             </a:avLst>
           </a:prstGeom>
           <a:solidFill>
             <a:srgbClr val="FFF7F7"/>
           </a:solidFill>
-          <a:ln w="12700">
+          <a:ln w="15875">
             <a:solidFill>
               <a:srgbClr val="C00000"/>
             </a:solidFill>
@@ -10317,237 +11905,25 @@
       </p:sp>
       <p:sp>
         <p:nvSpPr>
-          <p:cNvPr id="41" name="TextBox 40"/>
-          <p:cNvSpPr txBox="1"/>
-          <p:nvPr/>
-        </p:nvSpPr>
-        <p:spPr>
-          <a:xfrm>
-            <a:off x="3790950" y="5162550"/>
-            <a:ext cx="1428750" cy="171450"/>
-          </a:xfrm>
-          <a:prstGeom prst="rect">
-            <a:avLst/>
-          </a:prstGeom>
-          <a:noFill/>
-        </p:spPr>
-        <p:txBody>
-          <a:bodyPr wrap="square" anchor="t" lIns="0" rIns="0" tIns="0" bIns="0">
-            <a:spAutoFit/>
-          </a:bodyPr>
-          <a:lstStyle/>
-          <a:p>
-            <a:pPr algn="ctr">
-              <a:lnSpc>
-                <a:spcPct val="125000"/>
-              </a:lnSpc>
-              <a:spcAft>
-                <a:spcPts val="200"/>
-              </a:spcAft>
-            </a:pPr>
-            <a:r>
-              <a:rPr sz="950" b="0">
-                <a:solidFill>
-                  <a:srgbClr val="000000"/>
-                </a:solidFill>
-                <a:latin typeface="微软雅黑"/>
-                <a:ea typeface="微软雅黑"/>
-              </a:rPr>
-              <a:t>教训写入 pitfalls/</a:t>
-            </a:r>
-          </a:p>
-        </p:txBody>
-      </p:sp>
-      <p:sp>
-        <p:nvSpPr>
-          <p:cNvPr id="42" name="TextBox 41"/>
-          <p:cNvSpPr txBox="1"/>
-          <p:nvPr/>
-        </p:nvSpPr>
-        <p:spPr>
-          <a:xfrm>
-            <a:off x="3790950" y="5334000"/>
-            <a:ext cx="1428750" cy="133350"/>
-          </a:xfrm>
-          <a:prstGeom prst="rect">
-            <a:avLst/>
-          </a:prstGeom>
-          <a:noFill/>
-        </p:spPr>
-        <p:txBody>
-          <a:bodyPr wrap="square" anchor="t" lIns="0" rIns="0" tIns="0" bIns="0">
-            <a:spAutoFit/>
-          </a:bodyPr>
-          <a:lstStyle/>
-          <a:p>
-            <a:pPr algn="ctr">
-              <a:lnSpc>
-                <a:spcPct val="125000"/>
-              </a:lnSpc>
-              <a:spcAft>
-                <a:spcPts val="200"/>
-              </a:spcAft>
-            </a:pPr>
-            <a:r>
-              <a:rPr sz="800" b="0">
-                <a:solidFill>
-                  <a:srgbClr val="555555"/>
-                </a:solidFill>
-                <a:latin typeface="微软雅黑"/>
-                <a:ea typeface="微软雅黑"/>
-              </a:rPr>
-              <a:t>或对应约束页</a:t>
-            </a:r>
-          </a:p>
-        </p:txBody>
-      </p:sp>
-      <p:cxnSp>
-        <p:nvCxnSpPr>
-          <p:cNvPr id="43" name="Connector 42"/>
-          <p:cNvCxnSpPr/>
-          <p:nvPr/>
-        </p:nvCxnSpPr>
-        <p:spPr>
-          <a:xfrm flipH="1">
-            <a:off x="1333500" y="5581650"/>
-            <a:ext cx="2809875" cy="247650"/>
-          </a:xfrm>
-          <a:prstGeom prst="line">
-            <a:avLst/>
-          </a:prstGeom>
-          <a:ln w="15875">
-            <a:solidFill>
-              <a:srgbClr val="C00000"/>
-            </a:solidFill>
-            <a:prstDash val="dash"/>
-            <a:tailEnd type="triangle" w="med" len="med"/>
-          </a:ln>
-          <a:effectLst/>
-        </p:spPr>
-        <p:style>
-          <a:lnRef idx="2">
-            <a:schemeClr val="accent1"/>
-          </a:lnRef>
-          <a:fillRef idx="0">
-            <a:schemeClr val="accent1"/>
-          </a:fillRef>
-          <a:effectRef idx="1">
-            <a:schemeClr val="accent1"/>
-          </a:effectRef>
-          <a:fontRef idx="minor">
-            <a:schemeClr val="tx1"/>
-          </a:fontRef>
-        </p:style>
-      </p:cxnSp>
-      <p:sp>
-        <p:nvSpPr>
-          <p:cNvPr id="44" name="TextBox 43"/>
-          <p:cNvSpPr txBox="1"/>
-          <p:nvPr/>
-        </p:nvSpPr>
-        <p:spPr>
-          <a:xfrm>
-            <a:off x="1809750" y="5791200"/>
-            <a:ext cx="2095500" cy="152400"/>
-          </a:xfrm>
-          <a:prstGeom prst="rect">
-            <a:avLst/>
-          </a:prstGeom>
-          <a:noFill/>
-        </p:spPr>
-        <p:txBody>
-          <a:bodyPr wrap="square" anchor="t" lIns="0" rIns="0" tIns="0" bIns="0">
-            <a:spAutoFit/>
-          </a:bodyPr>
-          <a:lstStyle/>
-          <a:p>
-            <a:pPr algn="l">
-              <a:lnSpc>
-                <a:spcPct val="125000"/>
-              </a:lnSpc>
-              <a:spcAft>
-                <a:spcPts val="200"/>
-              </a:spcAft>
-            </a:pPr>
-            <a:r>
-              <a:rPr sz="850" b="0">
-                <a:solidFill>
-                  <a:srgbClr val="C00000"/>
-                </a:solidFill>
-                <a:latin typeface="微软雅黑"/>
-                <a:ea typeface="微软雅黑"/>
-              </a:rPr>
-              <a:t>下次会话不再犯</a:t>
-            </a:r>
-          </a:p>
-        </p:txBody>
-      </p:sp>
-      <p:sp>
-        <p:nvSpPr>
-          <p:cNvPr id="45" name="TextBox 44"/>
-          <p:cNvSpPr txBox="1"/>
-          <p:nvPr/>
-        </p:nvSpPr>
-        <p:spPr>
-          <a:xfrm>
-            <a:off x="6286500" y="4876800"/>
-            <a:ext cx="2667000" cy="171450"/>
-          </a:xfrm>
-          <a:prstGeom prst="rect">
-            <a:avLst/>
-          </a:prstGeom>
-          <a:noFill/>
-        </p:spPr>
-        <p:txBody>
-          <a:bodyPr wrap="square" anchor="t" lIns="0" rIns="0" tIns="0" bIns="0">
-            <a:spAutoFit/>
-          </a:bodyPr>
-          <a:lstStyle/>
-          <a:p>
-            <a:pPr algn="l">
-              <a:lnSpc>
-                <a:spcPct val="125000"/>
-              </a:lnSpc>
-              <a:spcAft>
-                <a:spcPts val="200"/>
-              </a:spcAft>
-            </a:pPr>
-            <a:r>
-              <a:rPr sz="1050" b="1">
-                <a:solidFill>
-                  <a:srgbClr val="0000FF"/>
-                </a:solidFill>
-                <a:latin typeface="微软雅黑"/>
-                <a:ea typeface="微软雅黑"/>
-              </a:rPr>
-              <a:t>闭环 2：变更 → 知识同步</a:t>
-            </a:r>
-          </a:p>
-        </p:txBody>
-      </p:sp>
-      <p:sp>
-        <p:nvSpPr>
-          <p:cNvPr id="46" name="Rounded Rectangle 45"/>
+          <p:cNvPr id="67" name="Rounded Rectangle 66"/>
           <p:cNvSpPr/>
           <p:nvPr/>
         </p:nvSpPr>
         <p:spPr>
           <a:xfrm>
-            <a:off x="6286500" y="5124450"/>
-            <a:ext cx="1600200" cy="438150"/>
+            <a:off x="533400" y="5629275"/>
+            <a:ext cx="742950" cy="190500"/>
           </a:xfrm>
           <a:prstGeom prst="roundRect">
             <a:avLst>
-              <a:gd name="adj" fmla="val 8000"/>
+              <a:gd name="adj" fmla="val 25000"/>
             </a:avLst>
           </a:prstGeom>
           <a:solidFill>
-            <a:srgbClr val="F0F0FF"/>
+            <a:srgbClr val="C00000"/>
           </a:solidFill>
-          <a:ln w="12700">
-            <a:solidFill>
-              <a:srgbClr val="0000FF"/>
-            </a:solidFill>
+          <a:ln>
+            <a:noFill/>
           </a:ln>
           <a:effectLst/>
         </p:spPr>
@@ -10566,23 +11942,33 @@
           </a:fontRef>
         </p:style>
         <p:txBody>
-          <a:bodyPr rtlCol="0" anchor="ctr" lIns="0" rIns="0"/>
+          <a:bodyPr rtlCol="0" anchor="ctr" lIns="0" rIns="0" wrap="none" tIns="0" bIns="0"/>
           <a:lstStyle/>
           <a:p>
             <a:pPr algn="ctr"/>
-          </a:p>
-        </p:txBody>
-      </p:sp>
-      <p:sp>
-        <p:nvSpPr>
-          <p:cNvPr id="47" name="TextBox 46"/>
+            <a:r>
+              <a:rPr sz="950" b="1">
+                <a:solidFill>
+                  <a:srgbClr val="FFFFFF"/>
+                </a:solidFill>
+                <a:latin typeface="微软雅黑"/>
+                <a:ea typeface="微软雅黑"/>
+              </a:rPr>
+              <a:t>运营心法</a:t>
+            </a:r>
+          </a:p>
+        </p:txBody>
+      </p:sp>
+      <p:sp>
+        <p:nvSpPr>
+          <p:cNvPr id="68" name="TextBox 67"/>
           <p:cNvSpPr txBox="1"/>
           <p:nvPr/>
         </p:nvSpPr>
         <p:spPr>
           <a:xfrm>
-            <a:off x="6286500" y="5162550"/>
-            <a:ext cx="1600200" cy="171450"/>
+            <a:off x="1371600" y="5619750"/>
+            <a:ext cx="10267950" cy="419100"/>
           </a:xfrm>
           <a:prstGeom prst="rect">
             <a:avLst/>
@@ -10595,489 +11981,83 @@
           </a:bodyPr>
           <a:lstStyle/>
           <a:p>
-            <a:pPr algn="ctr">
-              <a:lnSpc>
-                <a:spcPct val="125000"/>
+            <a:pPr algn="l">
+              <a:lnSpc>
+                <a:spcPct val="130000"/>
               </a:lnSpc>
               <a:spcAft>
                 <a:spcPts val="200"/>
               </a:spcAft>
             </a:pPr>
             <a:r>
-              <a:rPr sz="950" b="0">
+              <a:rPr sz="1100" b="0">
                 <a:solidFill>
                   <a:srgbClr val="000000"/>
                 </a:solidFill>
                 <a:latin typeface="微软雅黑"/>
                 <a:ea typeface="微软雅黑"/>
               </a:rPr>
-              <a:t>代码变更合入</a:t>
-            </a:r>
-          </a:p>
-        </p:txBody>
-      </p:sp>
-      <p:sp>
-        <p:nvSpPr>
-          <p:cNvPr id="48" name="TextBox 47"/>
-          <p:cNvSpPr txBox="1"/>
-          <p:nvPr/>
-        </p:nvSpPr>
-        <p:spPr>
-          <a:xfrm>
-            <a:off x="6286500" y="5334000"/>
-            <a:ext cx="1600200" cy="133350"/>
-          </a:xfrm>
-          <a:prstGeom prst="rect">
-            <a:avLst/>
-          </a:prstGeom>
-          <a:noFill/>
-        </p:spPr>
-        <p:txBody>
-          <a:bodyPr wrap="square" anchor="t" lIns="0" rIns="0" tIns="0" bIns="0">
-            <a:spAutoFit/>
-          </a:bodyPr>
-          <a:lstStyle/>
-          <a:p>
-            <a:pPr algn="ctr">
-              <a:lnSpc>
-                <a:spcPct val="125000"/>
-              </a:lnSpc>
-              <a:spcAft>
-                <a:spcPts val="200"/>
-              </a:spcAft>
-            </a:pPr>
-            <a:r>
-              <a:rPr sz="800" b="0">
-                <a:solidFill>
-                  <a:srgbClr val="555555"/>
-                </a:solidFill>
-                <a:latin typeface="微软雅黑"/>
-                <a:ea typeface="微软雅黑"/>
-              </a:rPr>
-              <a:t>spec delta 归档</a:t>
-            </a:r>
-          </a:p>
-        </p:txBody>
-      </p:sp>
-      <p:cxnSp>
-        <p:nvCxnSpPr>
-          <p:cNvPr id="49" name="Connector 48"/>
-          <p:cNvCxnSpPr/>
-          <p:nvPr/>
-        </p:nvCxnSpPr>
-        <p:spPr>
-          <a:xfrm>
-            <a:off x="7886700" y="5343525"/>
-            <a:ext cx="209550" cy="0"/>
-          </a:xfrm>
-          <a:prstGeom prst="line">
-            <a:avLst/>
-          </a:prstGeom>
-          <a:ln w="19050">
-            <a:solidFill>
-              <a:srgbClr val="0000FF"/>
-            </a:solidFill>
-            <a:tailEnd type="triangle" w="med" len="med"/>
-          </a:ln>
-          <a:effectLst/>
-        </p:spPr>
-        <p:style>
-          <a:lnRef idx="2">
-            <a:schemeClr val="accent1"/>
-          </a:lnRef>
-          <a:fillRef idx="0">
-            <a:schemeClr val="accent1"/>
-          </a:fillRef>
-          <a:effectRef idx="1">
-            <a:schemeClr val="accent1"/>
-          </a:effectRef>
-          <a:fontRef idx="minor">
-            <a:schemeClr val="tx1"/>
-          </a:fontRef>
-        </p:style>
-      </p:cxnSp>
-      <p:sp>
-        <p:nvSpPr>
-          <p:cNvPr id="50" name="Rounded Rectangle 49"/>
-          <p:cNvSpPr/>
-          <p:nvPr/>
-        </p:nvSpPr>
-        <p:spPr>
-          <a:xfrm>
-            <a:off x="8096250" y="5124450"/>
-            <a:ext cx="1600200" cy="438150"/>
-          </a:xfrm>
-          <a:prstGeom prst="roundRect">
-            <a:avLst>
-              <a:gd name="adj" fmla="val 8000"/>
-            </a:avLst>
-          </a:prstGeom>
-          <a:solidFill>
-            <a:srgbClr val="F0F0FF"/>
-          </a:solidFill>
-          <a:ln w="12700">
-            <a:solidFill>
-              <a:srgbClr val="0000FF"/>
-            </a:solidFill>
-          </a:ln>
-          <a:effectLst/>
-        </p:spPr>
-        <p:style>
-          <a:lnRef idx="1">
-            <a:schemeClr val="accent1"/>
-          </a:lnRef>
-          <a:fillRef idx="3">
-            <a:schemeClr val="accent1"/>
-          </a:fillRef>
-          <a:effectRef idx="2">
-            <a:schemeClr val="accent1"/>
-          </a:effectRef>
-          <a:fontRef idx="minor">
-            <a:schemeClr val="lt1"/>
-          </a:fontRef>
-        </p:style>
-        <p:txBody>
-          <a:bodyPr rtlCol="0" anchor="ctr" lIns="0" rIns="0"/>
-          <a:lstStyle/>
-          <a:p>
-            <a:pPr algn="ctr"/>
-          </a:p>
-        </p:txBody>
-      </p:sp>
-      <p:sp>
-        <p:nvSpPr>
-          <p:cNvPr id="51" name="TextBox 50"/>
-          <p:cNvSpPr txBox="1"/>
-          <p:nvPr/>
-        </p:nvSpPr>
-        <p:spPr>
-          <a:xfrm>
-            <a:off x="8096250" y="5162550"/>
-            <a:ext cx="1600200" cy="171450"/>
-          </a:xfrm>
-          <a:prstGeom prst="rect">
-            <a:avLst/>
-          </a:prstGeom>
-          <a:noFill/>
-        </p:spPr>
-        <p:txBody>
-          <a:bodyPr wrap="square" anchor="t" lIns="0" rIns="0" tIns="0" bIns="0">
-            <a:spAutoFit/>
-          </a:bodyPr>
-          <a:lstStyle/>
-          <a:p>
-            <a:pPr algn="ctr">
-              <a:lnSpc>
-                <a:spcPct val="125000"/>
-              </a:lnSpc>
-              <a:spcAft>
-                <a:spcPts val="200"/>
-              </a:spcAft>
-            </a:pPr>
-            <a:r>
-              <a:rPr sz="950" b="0">
+              <a:t>知识库像代码一样运营：</a:t>
+            </a:r>
+            <a:r>
+              <a:rPr sz="1100" b="1">
+                <a:solidFill>
+                  <a:srgbClr val="0000FF"/>
+                </a:solidFill>
+                <a:latin typeface="微软雅黑"/>
+                <a:ea typeface="微软雅黑"/>
+              </a:rPr>
+              <a:t>四类触发器 = 持续集成</a:t>
+            </a:r>
+            <a:r>
+              <a:rPr sz="1100" b="0">
                 <a:solidFill>
                   <a:srgbClr val="000000"/>
                 </a:solidFill>
                 <a:latin typeface="微软雅黑"/>
                 <a:ea typeface="微软雅黑"/>
               </a:rPr>
-              <a:t>/opsx:archive 钩子</a:t>
-            </a:r>
-          </a:p>
-        </p:txBody>
-      </p:sp>
-      <p:sp>
-        <p:nvSpPr>
-          <p:cNvPr id="52" name="TextBox 51"/>
-          <p:cNvSpPr txBox="1"/>
-          <p:nvPr/>
-        </p:nvSpPr>
-        <p:spPr>
-          <a:xfrm>
-            <a:off x="8096250" y="5334000"/>
-            <a:ext cx="1600200" cy="133350"/>
-          </a:xfrm>
-          <a:prstGeom prst="rect">
-            <a:avLst/>
-          </a:prstGeom>
-          <a:noFill/>
-        </p:spPr>
-        <p:txBody>
-          <a:bodyPr wrap="square" anchor="t" lIns="0" rIns="0" tIns="0" bIns="0">
-            <a:spAutoFit/>
-          </a:bodyPr>
-          <a:lstStyle/>
-          <a:p>
-            <a:pPr algn="ctr">
-              <a:lnSpc>
-                <a:spcPct val="125000"/>
-              </a:lnSpc>
-              <a:spcAft>
-                <a:spcPts val="200"/>
-              </a:spcAft>
-            </a:pPr>
-            <a:r>
-              <a:rPr sz="800" b="0">
-                <a:solidFill>
-                  <a:srgbClr val="555555"/>
-                </a:solidFill>
-                <a:latin typeface="微软雅黑"/>
-                <a:ea typeface="微软雅黑"/>
-              </a:rPr>
-              <a:t>检查受影响 wiki 页</a:t>
-            </a:r>
-          </a:p>
-        </p:txBody>
-      </p:sp>
-      <p:cxnSp>
-        <p:nvCxnSpPr>
-          <p:cNvPr id="53" name="Connector 52"/>
-          <p:cNvCxnSpPr/>
-          <p:nvPr/>
-        </p:nvCxnSpPr>
-        <p:spPr>
-          <a:xfrm>
-            <a:off x="9696450" y="5343525"/>
-            <a:ext cx="209550" cy="0"/>
-          </a:xfrm>
-          <a:prstGeom prst="line">
-            <a:avLst/>
-          </a:prstGeom>
-          <a:ln w="19050">
-            <a:solidFill>
-              <a:srgbClr val="0000FF"/>
-            </a:solidFill>
-            <a:tailEnd type="triangle" w="med" len="med"/>
-          </a:ln>
-          <a:effectLst/>
-        </p:spPr>
-        <p:style>
-          <a:lnRef idx="2">
-            <a:schemeClr val="accent1"/>
-          </a:lnRef>
-          <a:fillRef idx="0">
-            <a:schemeClr val="accent1"/>
-          </a:fillRef>
-          <a:effectRef idx="1">
-            <a:schemeClr val="accent1"/>
-          </a:effectRef>
-          <a:fontRef idx="minor">
-            <a:schemeClr val="tx1"/>
-          </a:fontRef>
-        </p:style>
-      </p:cxnSp>
-      <p:sp>
-        <p:nvSpPr>
-          <p:cNvPr id="54" name="Rounded Rectangle 53"/>
-          <p:cNvSpPr/>
-          <p:nvPr/>
-        </p:nvSpPr>
-        <p:spPr>
-          <a:xfrm>
-            <a:off x="9906000" y="5124450"/>
-            <a:ext cx="1600200" cy="438150"/>
-          </a:xfrm>
-          <a:prstGeom prst="roundRect">
-            <a:avLst>
-              <a:gd name="adj" fmla="val 8000"/>
-            </a:avLst>
-          </a:prstGeom>
-          <a:solidFill>
-            <a:srgbClr val="F0F0FF"/>
-          </a:solidFill>
-          <a:ln w="12700">
-            <a:solidFill>
-              <a:srgbClr val="0000FF"/>
-            </a:solidFill>
-          </a:ln>
-          <a:effectLst/>
-        </p:spPr>
-        <p:style>
-          <a:lnRef idx="1">
-            <a:schemeClr val="accent1"/>
-          </a:lnRef>
-          <a:fillRef idx="3">
-            <a:schemeClr val="accent1"/>
-          </a:fillRef>
-          <a:effectRef idx="2">
-            <a:schemeClr val="accent1"/>
-          </a:effectRef>
-          <a:fontRef idx="minor">
-            <a:schemeClr val="lt1"/>
-          </a:fontRef>
-        </p:style>
-        <p:txBody>
-          <a:bodyPr rtlCol="0" anchor="ctr" lIns="0" rIns="0"/>
-          <a:lstStyle/>
-          <a:p>
-            <a:pPr algn="ctr"/>
-          </a:p>
-        </p:txBody>
-      </p:sp>
-      <p:sp>
-        <p:nvSpPr>
-          <p:cNvPr id="55" name="TextBox 54"/>
-          <p:cNvSpPr txBox="1"/>
-          <p:nvPr/>
-        </p:nvSpPr>
-        <p:spPr>
-          <a:xfrm>
-            <a:off x="9906000" y="5162550"/>
-            <a:ext cx="1600200" cy="171450"/>
-          </a:xfrm>
-          <a:prstGeom prst="rect">
-            <a:avLst/>
-          </a:prstGeom>
-          <a:noFill/>
-        </p:spPr>
-        <p:txBody>
-          <a:bodyPr wrap="square" anchor="t" lIns="0" rIns="0" tIns="0" bIns="0">
-            <a:spAutoFit/>
-          </a:bodyPr>
-          <a:lstStyle/>
-          <a:p>
-            <a:pPr algn="ctr">
-              <a:lnSpc>
-                <a:spcPct val="125000"/>
-              </a:lnSpc>
-              <a:spcAft>
-                <a:spcPts val="200"/>
-              </a:spcAft>
-            </a:pPr>
-            <a:r>
-              <a:rPr sz="950" b="0">
+              <a:t>；</a:t>
+            </a:r>
+            <a:r>
+              <a:rPr sz="1100" b="1">
+                <a:solidFill>
+                  <a:srgbClr val="0000FF"/>
+                </a:solidFill>
+                <a:latin typeface="微软雅黑"/>
+                <a:ea typeface="微软雅黑"/>
+              </a:rPr>
+              <a:t>知识测评 = 单元测试</a:t>
+            </a:r>
+            <a:r>
+              <a:rPr sz="1100" b="0">
                 <a:solidFill>
                   <a:srgbClr val="000000"/>
                 </a:solidFill>
                 <a:latin typeface="微软雅黑"/>
                 <a:ea typeface="微软雅黑"/>
               </a:rPr>
-              <a:t>wiki 更新 + CI lint</a:t>
-            </a:r>
-          </a:p>
-        </p:txBody>
-      </p:sp>
-      <p:sp>
-        <p:nvSpPr>
-          <p:cNvPr id="56" name="TextBox 55"/>
-          <p:cNvSpPr txBox="1"/>
-          <p:nvPr/>
-        </p:nvSpPr>
-        <p:spPr>
-          <a:xfrm>
-            <a:off x="9906000" y="5334000"/>
-            <a:ext cx="1600200" cy="133350"/>
-          </a:xfrm>
-          <a:prstGeom prst="rect">
-            <a:avLst/>
-          </a:prstGeom>
-          <a:noFill/>
-        </p:spPr>
-        <p:txBody>
-          <a:bodyPr wrap="square" anchor="t" lIns="0" rIns="0" tIns="0" bIns="0">
-            <a:spAutoFit/>
-          </a:bodyPr>
-          <a:lstStyle/>
-          <a:p>
-            <a:pPr algn="ctr">
-              <a:lnSpc>
-                <a:spcPct val="125000"/>
-              </a:lnSpc>
-              <a:spcAft>
-                <a:spcPts val="200"/>
-              </a:spcAft>
-            </a:pPr>
-            <a:r>
-              <a:rPr sz="800" b="0">
-                <a:solidFill>
-                  <a:srgbClr val="555555"/>
-                </a:solidFill>
-                <a:latin typeface="微软雅黑"/>
-                <a:ea typeface="微软雅黑"/>
-              </a:rPr>
-              <a:t>死链 / 一致性检查</a:t>
-            </a:r>
-          </a:p>
-        </p:txBody>
-      </p:sp>
-      <p:cxnSp>
-        <p:nvCxnSpPr>
-          <p:cNvPr id="57" name="Connector 56"/>
-          <p:cNvCxnSpPr/>
-          <p:nvPr/>
-        </p:nvCxnSpPr>
-        <p:spPr>
-          <a:xfrm flipH="1">
-            <a:off x="7239000" y="5581650"/>
-            <a:ext cx="3143250" cy="247650"/>
-          </a:xfrm>
-          <a:prstGeom prst="line">
-            <a:avLst/>
-          </a:prstGeom>
-          <a:ln w="15875">
-            <a:solidFill>
-              <a:srgbClr val="0000FF"/>
-            </a:solidFill>
-            <a:prstDash val="dash"/>
-            <a:tailEnd type="triangle" w="med" len="med"/>
-          </a:ln>
-          <a:effectLst/>
-        </p:spPr>
-        <p:style>
-          <a:lnRef idx="2">
-            <a:schemeClr val="accent1"/>
-          </a:lnRef>
-          <a:fillRef idx="0">
-            <a:schemeClr val="accent1"/>
-          </a:fillRef>
-          <a:effectRef idx="1">
-            <a:schemeClr val="accent1"/>
-          </a:effectRef>
-          <a:fontRef idx="minor">
-            <a:schemeClr val="tx1"/>
-          </a:fontRef>
-        </p:style>
-      </p:cxnSp>
-      <p:sp>
-        <p:nvSpPr>
-          <p:cNvPr id="58" name="TextBox 57"/>
-          <p:cNvSpPr txBox="1"/>
-          <p:nvPr/>
-        </p:nvSpPr>
-        <p:spPr>
-          <a:xfrm>
-            <a:off x="8096250" y="5791200"/>
-            <a:ext cx="2286000" cy="152400"/>
-          </a:xfrm>
-          <a:prstGeom prst="rect">
-            <a:avLst/>
-          </a:prstGeom>
-          <a:noFill/>
-        </p:spPr>
-        <p:txBody>
-          <a:bodyPr wrap="square" anchor="t" lIns="0" rIns="0" tIns="0" bIns="0">
-            <a:spAutoFit/>
-          </a:bodyPr>
-          <a:lstStyle/>
-          <a:p>
-            <a:pPr algn="l">
-              <a:lnSpc>
-                <a:spcPct val="125000"/>
-              </a:lnSpc>
-              <a:spcAft>
-                <a:spcPts val="200"/>
-              </a:spcAft>
-            </a:pPr>
-            <a:r>
-              <a:rPr sz="850" b="0">
+              <a:t>；</a:t>
+            </a:r>
+            <a:r>
+              <a:rPr sz="1100" b="1">
                 <a:solidFill>
                   <a:srgbClr val="0000FF"/>
                 </a:solidFill>
                 <a:latin typeface="微软雅黑"/>
                 <a:ea typeface="微软雅黑"/>
               </a:rPr>
-              <a:t>知识与代码永不漂移</a:t>
+              <a:t>知识调试 = 生产环境监控</a:t>
+            </a:r>
+            <a:r>
+              <a:rPr sz="1100" b="0">
+                <a:solidFill>
+                  <a:srgbClr val="000000"/>
+                </a:solidFill>
+                <a:latin typeface="微软雅黑"/>
+                <a:ea typeface="微软雅黑"/>
+              </a:rPr>
+              <a:t>——热点知识持续深挖、缺失知识及时补齐、零调用知识定期瘦身，知识库才能不腐化。</a:t>
             </a:r>
           </a:p>
         </p:txBody>
@@ -11925,7 +12905,7 @@
                 <a:latin typeface="微软雅黑"/>
                 <a:ea typeface="微软雅黑"/>
               </a:rPr>
-              <a:t>双闭环 + CI 巡检 + 横向复制</a:t>
+              <a:t>知识闭环 + CI 巡检 + 横向复制</a:t>
             </a:r>
           </a:p>
         </p:txBody>
@@ -13157,7 +14137,7 @@
                 <a:latin typeface="微软雅黑"/>
                 <a:ea typeface="微软雅黑"/>
               </a:rPr>
-              <a:t>双闭环</a:t>
+              <a:t>知识闭环</a:t>
             </a:r>
             <a:r>
               <a:rPr sz="950" b="0">
@@ -13167,7 +14147,7 @@
                 <a:latin typeface="微软雅黑"/>
                 <a:ea typeface="微软雅黑"/>
               </a:rPr>
-              <a:t>：错误回写 pitfalls/；/opsx:archive 联动 wiki 更新</a:t>
+              <a:t>：四类触发器（新源/测评/反馈/调试）驱动刷新</a:t>
             </a:r>
           </a:p>
           <a:p>
